--- a/codeus_rate_limiter_dhalchenko.pptx
+++ b/codeus_rate_limiter_dhalchenko.pptx
@@ -5,7 +5,7 @@
     <p:sldMasterId id="2147483648" r:id="rId1"/>
   </p:sldMasterIdLst>
   <p:notesMasterIdLst>
-    <p:notesMasterId r:id="rId23"/>
+    <p:notesMasterId r:id="rId25"/>
   </p:notesMasterIdLst>
   <p:sldIdLst>
     <p:sldId id="263" r:id="rId2"/>
@@ -18,17 +18,19 @@
     <p:sldId id="288" r:id="rId9"/>
     <p:sldId id="283" r:id="rId10"/>
     <p:sldId id="295" r:id="rId11"/>
-    <p:sldId id="296" r:id="rId12"/>
-    <p:sldId id="297" r:id="rId13"/>
-    <p:sldId id="298" r:id="rId14"/>
-    <p:sldId id="299" r:id="rId15"/>
-    <p:sldId id="300" r:id="rId16"/>
-    <p:sldId id="301" r:id="rId17"/>
-    <p:sldId id="302" r:id="rId18"/>
-    <p:sldId id="303" r:id="rId19"/>
-    <p:sldId id="304" r:id="rId20"/>
-    <p:sldId id="305" r:id="rId21"/>
-    <p:sldId id="273" r:id="rId22"/>
+    <p:sldId id="306" r:id="rId12"/>
+    <p:sldId id="307" r:id="rId13"/>
+    <p:sldId id="296" r:id="rId14"/>
+    <p:sldId id="297" r:id="rId15"/>
+    <p:sldId id="298" r:id="rId16"/>
+    <p:sldId id="299" r:id="rId17"/>
+    <p:sldId id="300" r:id="rId18"/>
+    <p:sldId id="301" r:id="rId19"/>
+    <p:sldId id="302" r:id="rId20"/>
+    <p:sldId id="303" r:id="rId21"/>
+    <p:sldId id="304" r:id="rId22"/>
+    <p:sldId id="305" r:id="rId23"/>
+    <p:sldId id="273" r:id="rId24"/>
   </p:sldIdLst>
   <p:sldSz cx="12192000" cy="6858000"/>
   <p:notesSz cx="6858000" cy="9144000"/>
@@ -217,7 +219,7 @@
           <a:p>
             <a:fld id="{47871E64-B4EF-4B40-B724-CEB241626157}" type="datetimeFigureOut">
               <a:rPr lang="en-US" smtClean="0"/>
-              <a:t>1/19/25</a:t>
+              <a:t>1/20/25</a:t>
             </a:fld>
             <a:endParaRPr lang="en-US"/>
           </a:p>
@@ -549,7 +551,7 @@
           <a:p>
             <a:fld id="{D7811F99-C2D7-914A-BF64-E3395516B297}" type="slidenum">
               <a:rPr lang="en-US" smtClean="0"/>
-              <a:t>21</a:t>
+              <a:t>23</a:t>
             </a:fld>
             <a:endParaRPr lang="en-US"/>
           </a:p>
@@ -715,7 +717,7 @@
           <a:p>
             <a:fld id="{72235F10-9AD9-9C43-8528-A461A66E7819}" type="datetimeFigureOut">
               <a:rPr lang="en-US" smtClean="0"/>
-              <a:t>1/19/25</a:t>
+              <a:t>1/20/25</a:t>
             </a:fld>
             <a:endParaRPr lang="en-US"/>
           </a:p>
@@ -913,7 +915,7 @@
           <a:p>
             <a:fld id="{72235F10-9AD9-9C43-8528-A461A66E7819}" type="datetimeFigureOut">
               <a:rPr lang="en-US" smtClean="0"/>
-              <a:t>1/19/25</a:t>
+              <a:t>1/20/25</a:t>
             </a:fld>
             <a:endParaRPr lang="en-US"/>
           </a:p>
@@ -1121,7 +1123,7 @@
           <a:p>
             <a:fld id="{72235F10-9AD9-9C43-8528-A461A66E7819}" type="datetimeFigureOut">
               <a:rPr lang="en-US" smtClean="0"/>
-              <a:t>1/19/25</a:t>
+              <a:t>1/20/25</a:t>
             </a:fld>
             <a:endParaRPr lang="en-US"/>
           </a:p>
@@ -1319,7 +1321,7 @@
           <a:p>
             <a:fld id="{72235F10-9AD9-9C43-8528-A461A66E7819}" type="datetimeFigureOut">
               <a:rPr lang="en-US" smtClean="0"/>
-              <a:t>1/19/25</a:t>
+              <a:t>1/20/25</a:t>
             </a:fld>
             <a:endParaRPr lang="en-US"/>
           </a:p>
@@ -1594,7 +1596,7 @@
           <a:p>
             <a:fld id="{72235F10-9AD9-9C43-8528-A461A66E7819}" type="datetimeFigureOut">
               <a:rPr lang="en-US" smtClean="0"/>
-              <a:t>1/19/25</a:t>
+              <a:t>1/20/25</a:t>
             </a:fld>
             <a:endParaRPr lang="en-US"/>
           </a:p>
@@ -1859,7 +1861,7 @@
           <a:p>
             <a:fld id="{72235F10-9AD9-9C43-8528-A461A66E7819}" type="datetimeFigureOut">
               <a:rPr lang="en-US" smtClean="0"/>
-              <a:t>1/19/25</a:t>
+              <a:t>1/20/25</a:t>
             </a:fld>
             <a:endParaRPr lang="en-US"/>
           </a:p>
@@ -2271,7 +2273,7 @@
           <a:p>
             <a:fld id="{72235F10-9AD9-9C43-8528-A461A66E7819}" type="datetimeFigureOut">
               <a:rPr lang="en-US" smtClean="0"/>
-              <a:t>1/19/25</a:t>
+              <a:t>1/20/25</a:t>
             </a:fld>
             <a:endParaRPr lang="en-US"/>
           </a:p>
@@ -2412,7 +2414,7 @@
           <a:p>
             <a:fld id="{72235F10-9AD9-9C43-8528-A461A66E7819}" type="datetimeFigureOut">
               <a:rPr lang="en-US" smtClean="0"/>
-              <a:t>1/19/25</a:t>
+              <a:t>1/20/25</a:t>
             </a:fld>
             <a:endParaRPr lang="en-US"/>
           </a:p>
@@ -2525,7 +2527,7 @@
           <a:p>
             <a:fld id="{72235F10-9AD9-9C43-8528-A461A66E7819}" type="datetimeFigureOut">
               <a:rPr lang="en-US" smtClean="0"/>
-              <a:t>1/19/25</a:t>
+              <a:t>1/20/25</a:t>
             </a:fld>
             <a:endParaRPr lang="en-US"/>
           </a:p>
@@ -2836,7 +2838,7 @@
           <a:p>
             <a:fld id="{72235F10-9AD9-9C43-8528-A461A66E7819}" type="datetimeFigureOut">
               <a:rPr lang="en-US" smtClean="0"/>
-              <a:t>1/19/25</a:t>
+              <a:t>1/20/25</a:t>
             </a:fld>
             <a:endParaRPr lang="en-US"/>
           </a:p>
@@ -3124,7 +3126,7 @@
           <a:p>
             <a:fld id="{72235F10-9AD9-9C43-8528-A461A66E7819}" type="datetimeFigureOut">
               <a:rPr lang="en-US" smtClean="0"/>
-              <a:t>1/19/25</a:t>
+              <a:t>1/20/25</a:t>
             </a:fld>
             <a:endParaRPr lang="en-US"/>
           </a:p>
@@ -3365,7 +3367,7 @@
           <a:p>
             <a:fld id="{72235F10-9AD9-9C43-8528-A461A66E7819}" type="datetimeFigureOut">
               <a:rPr lang="en-US" smtClean="0"/>
-              <a:t>1/19/25</a:t>
+              <a:t>1/20/25</a:t>
             </a:fld>
             <a:endParaRPr lang="en-US"/>
           </a:p>
@@ -5336,13 +5338,13 @@
         </p:nvSpPr>
         <p:spPr>
           <a:xfrm>
-            <a:off x="5978400" y="2568878"/>
-            <a:ext cx="5624118" cy="860122"/>
+            <a:off x="6090045" y="1346200"/>
+            <a:ext cx="5624118" cy="3284538"/>
           </a:xfrm>
         </p:spPr>
         <p:txBody>
           <a:bodyPr anchor="b">
-            <a:normAutofit fontScale="90000"/>
+            <a:normAutofit/>
           </a:bodyPr>
           <a:lstStyle/>
           <a:p>
@@ -5381,7 +5383,7 @@
                 <a:latin typeface="Calibri" panose="020F0502020204030204" pitchFamily="34" charset="0"/>
                 <a:cs typeface="Calibri" panose="020F0502020204030204" pitchFamily="34" charset="0"/>
               </a:rPr>
-              <a:t>Rate Limiter</a:t>
+              <a:t>Lua Scripts in Redis</a:t>
             </a:r>
           </a:p>
         </p:txBody>
@@ -6124,7 +6126,7 @@
     </p:spTree>
     <p:extLst>
       <p:ext uri="{BB962C8B-B14F-4D97-AF65-F5344CB8AC3E}">
-        <p14:creationId xmlns:p14="http://schemas.microsoft.com/office/powerpoint/2010/main" val="2525989253"/>
+        <p14:creationId xmlns:p14="http://schemas.microsoft.com/office/powerpoint/2010/main" val="44305287"/>
       </p:ext>
     </p:extLst>
   </p:cSld>
@@ -6456,12 +6458,12 @@
         </p:spPr>
         <p:txBody>
           <a:bodyPr>
-            <a:normAutofit fontScale="90000"/>
+            <a:noAutofit/>
           </a:bodyPr>
           <a:lstStyle/>
           <a:p>
             <a:r>
-              <a:rPr lang="en-US" sz="6000" b="1" dirty="0">
+              <a:rPr lang="en-US" sz="5400" b="1" dirty="0">
                 <a:gradFill flip="none" rotWithShape="1">
                   <a:gsLst>
                     <a:gs pos="7000">
@@ -6494,9 +6496,9 @@
                 <a:latin typeface="Calibri" panose="020F0502020204030204" pitchFamily="34" charset="0"/>
                 <a:cs typeface="Calibri" panose="020F0502020204030204" pitchFamily="34" charset="0"/>
               </a:rPr>
-              <a:t>What is Rate Limiting</a:t>
+              <a:t>Lua Scripts in Redis</a:t>
             </a:r>
-            <a:endParaRPr lang="en-US" sz="4000" dirty="0"/>
+            <a:endParaRPr lang="en-US" sz="2400" dirty="0"/>
           </a:p>
         </p:txBody>
       </p:sp>
@@ -6548,16 +6550,17 @@
         </p:nvSpPr>
         <p:spPr>
           <a:xfrm>
-            <a:off x="838200" y="2208943"/>
-            <a:ext cx="10515600" cy="3968019"/>
+            <a:off x="836675" y="1253331"/>
+            <a:ext cx="10515600" cy="4351338"/>
           </a:xfrm>
         </p:spPr>
         <p:txBody>
           <a:bodyPr/>
           <a:lstStyle/>
           <a:p>
-            <a:pPr marL="0" indent="0" algn="l">
-              <a:buNone/>
+            <a:pPr algn="l">
+              <a:buFont typeface="Arial" panose="020B0604020202020204" pitchFamily="34" charset="0"/>
+              <a:buChar char="•"/>
             </a:pPr>
             <a:r>
               <a:rPr lang="en-GB" b="0" i="0" u="none" strike="noStrike" dirty="0">
@@ -6565,18 +6568,97 @@
                   <a:srgbClr val="000000"/>
                 </a:solidFill>
                 <a:effectLst/>
-                <a:latin typeface="Space Grotesk"/>
               </a:rPr>
-              <a:t>Rate Limiting entails techniques to regulate the number of requests a particular client can make against a networked service. It caps the total number and/or the frequency of requests.</a:t>
+              <a:t>Lua scripting allows you to run server-side scripts in Redis for atomic operations.</a:t>
             </a:r>
+          </a:p>
+          <a:p>
+            <a:pPr algn="l">
+              <a:buFont typeface="Arial" panose="020B0604020202020204" pitchFamily="34" charset="0"/>
+              <a:buChar char="•"/>
+            </a:pPr>
+            <a:r>
+              <a:rPr lang="en-GB" b="0" i="0" u="none" strike="noStrike" dirty="0">
+                <a:solidFill>
+                  <a:srgbClr val="000000"/>
+                </a:solidFill>
+                <a:effectLst/>
+              </a:rPr>
+              <a:t>Key Benefits:</a:t>
+            </a:r>
+          </a:p>
+          <a:p>
+            <a:pPr marL="742950" lvl="1" indent="-285750" algn="l">
+              <a:buFont typeface="Arial" panose="020B0604020202020204" pitchFamily="34" charset="0"/>
+              <a:buChar char="•"/>
+            </a:pPr>
+            <a:r>
+              <a:rPr lang="en-GB" b="0" i="0" u="none" strike="noStrike" dirty="0">
+                <a:solidFill>
+                  <a:srgbClr val="000000"/>
+                </a:solidFill>
+                <a:effectLst/>
+              </a:rPr>
+              <a:t>Minimized network round-trips.</a:t>
+            </a:r>
+          </a:p>
+          <a:p>
+            <a:pPr marL="742950" lvl="1" indent="-285750" algn="l">
+              <a:buFont typeface="Arial" panose="020B0604020202020204" pitchFamily="34" charset="0"/>
+              <a:buChar char="•"/>
+            </a:pPr>
+            <a:r>
+              <a:rPr lang="en-GB" b="0" i="0" u="none" strike="noStrike" dirty="0">
+                <a:solidFill>
+                  <a:srgbClr val="000000"/>
+                </a:solidFill>
+                <a:effectLst/>
+              </a:rPr>
+              <a:t>Atomic execution.</a:t>
+            </a:r>
+          </a:p>
+          <a:p>
+            <a:pPr marL="0" indent="0">
+              <a:buNone/>
+            </a:pPr>
             <a:endParaRPr lang="en-UA" dirty="0"/>
           </a:p>
         </p:txBody>
       </p:sp>
+      <p:pic>
+        <p:nvPicPr>
+          <p:cNvPr id="7" name="Picture 6">
+            <a:extLst>
+              <a:ext uri="{FF2B5EF4-FFF2-40B4-BE49-F238E27FC236}">
+                <a16:creationId xmlns:a16="http://schemas.microsoft.com/office/drawing/2014/main" id="{00F1B85B-5405-B38B-1205-ED659DFBBC55}"/>
+              </a:ext>
+            </a:extLst>
+          </p:cNvPr>
+          <p:cNvPicPr>
+            <a:picLocks noChangeAspect="1"/>
+          </p:cNvPicPr>
+          <p:nvPr/>
+        </p:nvPicPr>
+        <p:blipFill>
+          <a:blip r:embed="rId4"/>
+          <a:stretch>
+            <a:fillRect/>
+          </a:stretch>
+        </p:blipFill>
+        <p:spPr>
+          <a:xfrm>
+            <a:off x="7113044" y="2054131"/>
+            <a:ext cx="4826000" cy="3111500"/>
+          </a:xfrm>
+          <a:prstGeom prst="rect">
+            <a:avLst/>
+          </a:prstGeom>
+        </p:spPr>
+      </p:pic>
     </p:spTree>
     <p:extLst>
       <p:ext uri="{BB962C8B-B14F-4D97-AF65-F5344CB8AC3E}">
-        <p14:creationId xmlns:p14="http://schemas.microsoft.com/office/powerpoint/2010/main" val="731202426"/>
+        <p14:creationId xmlns:p14="http://schemas.microsoft.com/office/powerpoint/2010/main" val="3219936679"/>
       </p:ext>
     </p:extLst>
   </p:cSld>
@@ -6587,6 +6669,1040 @@
 </file>
 
 <file path=ppt/slides/slide13.xml><?xml version="1.0" encoding="utf-8"?>
+<p:sld xmlns:a="http://schemas.openxmlformats.org/drawingml/2006/main" xmlns:r="http://schemas.openxmlformats.org/officeDocument/2006/relationships" xmlns:p="http://schemas.openxmlformats.org/presentationml/2006/main">
+  <p:cSld>
+    <p:bg>
+      <p:bgPr>
+        <a:solidFill>
+          <a:schemeClr val="bg1"/>
+        </a:solidFill>
+        <a:effectLst/>
+      </p:bgPr>
+    </p:bg>
+    <p:spTree>
+      <p:nvGrpSpPr>
+        <p:cNvPr id="1" name="">
+          <a:extLst>
+            <a:ext uri="{FF2B5EF4-FFF2-40B4-BE49-F238E27FC236}">
+              <a16:creationId xmlns:a16="http://schemas.microsoft.com/office/drawing/2014/main" id="{0FA9C510-B57B-D7A1-D259-438DCD5A7C22}"/>
+            </a:ext>
+          </a:extLst>
+        </p:cNvPr>
+        <p:cNvGrpSpPr/>
+        <p:nvPr/>
+      </p:nvGrpSpPr>
+      <p:grpSpPr>
+        <a:xfrm>
+          <a:off x="0" y="0"/>
+          <a:ext cx="0" cy="0"/>
+          <a:chOff x="0" y="0"/>
+          <a:chExt cx="0" cy="0"/>
+        </a:xfrm>
+      </p:grpSpPr>
+      <p:sp>
+        <p:nvSpPr>
+          <p:cNvPr id="55" name="Rectangle 54">
+            <a:extLst>
+              <a:ext uri="{FF2B5EF4-FFF2-40B4-BE49-F238E27FC236}">
+                <a16:creationId xmlns:a16="http://schemas.microsoft.com/office/drawing/2014/main" id="{4945B18A-1F65-2296-918A-50AE45FE4D66}"/>
+              </a:ext>
+              <a:ext uri="{C183D7F6-B498-43B3-948B-1728B52AA6E4}">
+                <adec:decorative xmlns:adec="http://schemas.microsoft.com/office/drawing/2017/decorative" val="1"/>
+              </a:ext>
+            </a:extLst>
+          </p:cNvPr>
+          <p:cNvSpPr>
+            <a:spLocks noGrp="1" noRot="1" noChangeAspect="1" noMove="1" noResize="1" noEditPoints="1" noAdjustHandles="1" noChangeArrowheads="1" noChangeShapeType="1" noTextEdit="1"/>
+          </p:cNvSpPr>
+          <p:nvPr>
+            <p:extLst>
+              <p:ext uri="{386F3935-93C4-4BCD-93E2-E3B085C9AB24}">
+                <p16:designElem xmlns:p16="http://schemas.microsoft.com/office/powerpoint/2015/main" val="1"/>
+              </p:ext>
+            </p:extLst>
+          </p:nvPr>
+        </p:nvSpPr>
+        <p:spPr>
+          <a:xfrm>
+            <a:off x="305" y="0"/>
+            <a:ext cx="12191695" cy="6858000"/>
+          </a:xfrm>
+          <a:prstGeom prst="rect">
+            <a:avLst/>
+          </a:prstGeom>
+          <a:solidFill>
+            <a:schemeClr val="bg2">
+              <a:tint val="95000"/>
+              <a:satMod val="170000"/>
+            </a:schemeClr>
+          </a:solidFill>
+          <a:ln>
+            <a:noFill/>
+          </a:ln>
+        </p:spPr>
+        <p:style>
+          <a:lnRef idx="2">
+            <a:schemeClr val="accent1">
+              <a:shade val="50000"/>
+            </a:schemeClr>
+          </a:lnRef>
+          <a:fillRef idx="1">
+            <a:schemeClr val="accent1"/>
+          </a:fillRef>
+          <a:effectRef idx="0">
+            <a:schemeClr val="accent1"/>
+          </a:effectRef>
+          <a:fontRef idx="minor">
+            <a:schemeClr val="lt1"/>
+          </a:fontRef>
+        </p:style>
+        <p:txBody>
+          <a:bodyPr rtlCol="0" anchor="ctr"/>
+          <a:lstStyle/>
+          <a:p>
+            <a:pPr marL="0" marR="0" lvl="0" indent="0" algn="ctr" defTabSz="457200" rtl="0" eaLnBrk="1" fontAlgn="auto" latinLnBrk="0" hangingPunct="1">
+              <a:lnSpc>
+                <a:spcPct val="100000"/>
+              </a:lnSpc>
+              <a:spcBef>
+                <a:spcPts val="0"/>
+              </a:spcBef>
+              <a:spcAft>
+                <a:spcPts val="0"/>
+              </a:spcAft>
+              <a:buClrTx/>
+              <a:buSzTx/>
+              <a:buFontTx/>
+              <a:buNone/>
+              <a:tabLst/>
+              <a:defRPr/>
+            </a:pPr>
+            <a:endParaRPr kumimoji="0" lang="en-US" sz="1800" b="0" i="0" u="none" strike="noStrike" kern="1200" cap="none" spc="0" normalizeH="0" baseline="0" noProof="0" dirty="0">
+              <a:ln>
+                <a:noFill/>
+              </a:ln>
+              <a:solidFill>
+                <a:prstClr val="white"/>
+              </a:solidFill>
+              <a:effectLst/>
+              <a:uLnTx/>
+              <a:uFillTx/>
+              <a:latin typeface="Meiryo"/>
+              <a:ea typeface="+mn-ea"/>
+              <a:cs typeface="+mn-cs"/>
+            </a:endParaRPr>
+          </a:p>
+        </p:txBody>
+      </p:sp>
+      <p:sp>
+        <p:nvSpPr>
+          <p:cNvPr id="2" name="Title 1">
+            <a:extLst>
+              <a:ext uri="{FF2B5EF4-FFF2-40B4-BE49-F238E27FC236}">
+                <a16:creationId xmlns:a16="http://schemas.microsoft.com/office/drawing/2014/main" id="{4CBFA5EC-CB69-08CD-FE63-13F7481495FE}"/>
+              </a:ext>
+            </a:extLst>
+          </p:cNvPr>
+          <p:cNvSpPr>
+            <a:spLocks noGrp="1"/>
+          </p:cNvSpPr>
+          <p:nvPr>
+            <p:ph type="ctrTitle"/>
+          </p:nvPr>
+        </p:nvSpPr>
+        <p:spPr>
+          <a:xfrm>
+            <a:off x="5978400" y="2568878"/>
+            <a:ext cx="5624118" cy="860122"/>
+          </a:xfrm>
+        </p:spPr>
+        <p:txBody>
+          <a:bodyPr anchor="b">
+            <a:normAutofit fontScale="90000"/>
+          </a:bodyPr>
+          <a:lstStyle/>
+          <a:p>
+            <a:pPr algn="l"/>
+            <a:r>
+              <a:rPr lang="en-US" b="1" dirty="0">
+                <a:gradFill flip="none" rotWithShape="1">
+                  <a:gsLst>
+                    <a:gs pos="7000">
+                      <a:schemeClr val="tx2">
+                        <a:lumMod val="50000"/>
+                        <a:lumOff val="50000"/>
+                      </a:schemeClr>
+                    </a:gs>
+                    <a:gs pos="35000">
+                      <a:schemeClr val="accent5">
+                        <a:lumMod val="60000"/>
+                        <a:lumOff val="40000"/>
+                      </a:schemeClr>
+                    </a:gs>
+                    <a:gs pos="76000">
+                      <a:srgbClr val="0070C0"/>
+                    </a:gs>
+                    <a:gs pos="97000">
+                      <a:schemeClr val="tx2">
+                        <a:lumMod val="75000"/>
+                        <a:lumOff val="25000"/>
+                      </a:schemeClr>
+                    </a:gs>
+                  </a:gsLst>
+                  <a:path path="rect">
+                    <a:fillToRect l="100000" t="100000"/>
+                  </a:path>
+                  <a:tileRect r="-100000" b="-100000"/>
+                </a:gradFill>
+                <a:latin typeface="Calibri" panose="020F0502020204030204" pitchFamily="34" charset="0"/>
+                <a:cs typeface="Calibri" panose="020F0502020204030204" pitchFamily="34" charset="0"/>
+              </a:rPr>
+              <a:t>Rate Limiter</a:t>
+            </a:r>
+          </a:p>
+        </p:txBody>
+      </p:sp>
+      <p:sp>
+        <p:nvSpPr>
+          <p:cNvPr id="57" name="Freeform: Shape 56">
+            <a:extLst>
+              <a:ext uri="{FF2B5EF4-FFF2-40B4-BE49-F238E27FC236}">
+                <a16:creationId xmlns:a16="http://schemas.microsoft.com/office/drawing/2014/main" id="{09D164DF-38AD-1679-9764-B15DE26F224B}"/>
+              </a:ext>
+              <a:ext uri="{C183D7F6-B498-43B3-948B-1728B52AA6E4}">
+                <adec:decorative xmlns:adec="http://schemas.microsoft.com/office/drawing/2017/decorative" val="1"/>
+              </a:ext>
+            </a:extLst>
+          </p:cNvPr>
+          <p:cNvSpPr>
+            <a:spLocks noGrp="1" noRot="1" noChangeAspect="1" noMove="1" noResize="1" noEditPoints="1" noAdjustHandles="1" noChangeArrowheads="1" noChangeShapeType="1" noTextEdit="1"/>
+          </p:cNvSpPr>
+          <p:nvPr>
+            <p:extLst>
+              <p:ext uri="{386F3935-93C4-4BCD-93E2-E3B085C9AB24}">
+                <p16:designElem xmlns:p16="http://schemas.microsoft.com/office/powerpoint/2015/main" val="1"/>
+              </p:ext>
+            </p:extLst>
+          </p:nvPr>
+        </p:nvSpPr>
+        <p:spPr>
+          <a:xfrm>
+            <a:off x="3084938" y="0"/>
+            <a:ext cx="2529723" cy="6858000"/>
+          </a:xfrm>
+          <a:custGeom>
+            <a:avLst/>
+            <a:gdLst>
+              <a:gd name="connsiteX0" fmla="*/ 1258269 w 2529723"/>
+              <a:gd name="connsiteY0" fmla="*/ 0 h 6858000"/>
+              <a:gd name="connsiteX1" fmla="*/ 1275627 w 2529723"/>
+              <a:gd name="connsiteY1" fmla="*/ 0 h 6858000"/>
+              <a:gd name="connsiteX2" fmla="*/ 1302560 w 2529723"/>
+              <a:gd name="connsiteY2" fmla="*/ 24338 h 6858000"/>
+              <a:gd name="connsiteX3" fmla="*/ 2522825 w 2529723"/>
+              <a:gd name="connsiteY3" fmla="*/ 3678515 h 6858000"/>
+              <a:gd name="connsiteX4" fmla="*/ 557500 w 2529723"/>
+              <a:gd name="connsiteY4" fmla="*/ 6451411 h 6858000"/>
+              <a:gd name="connsiteX5" fmla="*/ 32482 w 2529723"/>
+              <a:gd name="connsiteY5" fmla="*/ 6849373 h 6858000"/>
+              <a:gd name="connsiteX6" fmla="*/ 19531 w 2529723"/>
+              <a:gd name="connsiteY6" fmla="*/ 6858000 h 6858000"/>
+              <a:gd name="connsiteX7" fmla="*/ 0 w 2529723"/>
+              <a:gd name="connsiteY7" fmla="*/ 6858000 h 6858000"/>
+              <a:gd name="connsiteX8" fmla="*/ 14202 w 2529723"/>
+              <a:gd name="connsiteY8" fmla="*/ 6848540 h 6858000"/>
+              <a:gd name="connsiteX9" fmla="*/ 539221 w 2529723"/>
+              <a:gd name="connsiteY9" fmla="*/ 6450578 h 6858000"/>
+              <a:gd name="connsiteX10" fmla="*/ 2504546 w 2529723"/>
+              <a:gd name="connsiteY10" fmla="*/ 3677682 h 6858000"/>
+              <a:gd name="connsiteX11" fmla="*/ 1284280 w 2529723"/>
+              <a:gd name="connsiteY11" fmla="*/ 23504 h 6858000"/>
+            </a:gdLst>
+            <a:ahLst/>
+            <a:cxnLst>
+              <a:cxn ang="0">
+                <a:pos x="connsiteX0" y="connsiteY0"/>
+              </a:cxn>
+              <a:cxn ang="0">
+                <a:pos x="connsiteX1" y="connsiteY1"/>
+              </a:cxn>
+              <a:cxn ang="0">
+                <a:pos x="connsiteX2" y="connsiteY2"/>
+              </a:cxn>
+              <a:cxn ang="0">
+                <a:pos x="connsiteX3" y="connsiteY3"/>
+              </a:cxn>
+              <a:cxn ang="0">
+                <a:pos x="connsiteX4" y="connsiteY4"/>
+              </a:cxn>
+              <a:cxn ang="0">
+                <a:pos x="connsiteX5" y="connsiteY5"/>
+              </a:cxn>
+              <a:cxn ang="0">
+                <a:pos x="connsiteX6" y="connsiteY6"/>
+              </a:cxn>
+              <a:cxn ang="0">
+                <a:pos x="connsiteX7" y="connsiteY7"/>
+              </a:cxn>
+              <a:cxn ang="0">
+                <a:pos x="connsiteX8" y="connsiteY8"/>
+              </a:cxn>
+              <a:cxn ang="0">
+                <a:pos x="connsiteX9" y="connsiteY9"/>
+              </a:cxn>
+              <a:cxn ang="0">
+                <a:pos x="connsiteX10" y="connsiteY10"/>
+              </a:cxn>
+              <a:cxn ang="0">
+                <a:pos x="connsiteX11" y="connsiteY11"/>
+              </a:cxn>
+            </a:cxnLst>
+            <a:rect l="l" t="t" r="r" b="b"/>
+            <a:pathLst>
+              <a:path w="2529723" h="6858000">
+                <a:moveTo>
+                  <a:pt x="1258269" y="0"/>
+                </a:moveTo>
+                <a:lnTo>
+                  <a:pt x="1275627" y="0"/>
+                </a:lnTo>
+                <a:lnTo>
+                  <a:pt x="1302560" y="24338"/>
+                </a:lnTo>
+                <a:cubicBezTo>
+                  <a:pt x="2156831" y="855667"/>
+                  <a:pt x="2590622" y="2191755"/>
+                  <a:pt x="2522825" y="3678515"/>
+                </a:cubicBezTo>
+                <a:cubicBezTo>
+                  <a:pt x="2459072" y="5076606"/>
+                  <a:pt x="1519830" y="5692656"/>
+                  <a:pt x="557500" y="6451411"/>
+                </a:cubicBezTo>
+                <a:cubicBezTo>
+                  <a:pt x="382255" y="6589587"/>
+                  <a:pt x="208689" y="6724853"/>
+                  <a:pt x="32482" y="6849373"/>
+                </a:cubicBezTo>
+                <a:lnTo>
+                  <a:pt x="19531" y="6858000"/>
+                </a:lnTo>
+                <a:lnTo>
+                  <a:pt x="0" y="6858000"/>
+                </a:lnTo>
+                <a:lnTo>
+                  <a:pt x="14202" y="6848540"/>
+                </a:lnTo>
+                <a:cubicBezTo>
+                  <a:pt x="190409" y="6724020"/>
+                  <a:pt x="363976" y="6588754"/>
+                  <a:pt x="539221" y="6450578"/>
+                </a:cubicBezTo>
+                <a:cubicBezTo>
+                  <a:pt x="1501550" y="5691822"/>
+                  <a:pt x="2440792" y="5075773"/>
+                  <a:pt x="2504546" y="3677682"/>
+                </a:cubicBezTo>
+                <a:cubicBezTo>
+                  <a:pt x="2572343" y="2190921"/>
+                  <a:pt x="2138551" y="854834"/>
+                  <a:pt x="1284280" y="23504"/>
+                </a:cubicBezTo>
+                <a:close/>
+              </a:path>
+            </a:pathLst>
+          </a:custGeom>
+          <a:solidFill>
+            <a:srgbClr val="FFFFFF">
+              <a:alpha val="50000"/>
+            </a:srgbClr>
+          </a:solidFill>
+          <a:ln>
+            <a:noFill/>
+          </a:ln>
+        </p:spPr>
+        <p:style>
+          <a:lnRef idx="2">
+            <a:schemeClr val="accent1">
+              <a:shade val="50000"/>
+            </a:schemeClr>
+          </a:lnRef>
+          <a:fillRef idx="1">
+            <a:schemeClr val="accent1"/>
+          </a:fillRef>
+          <a:effectRef idx="0">
+            <a:schemeClr val="accent1"/>
+          </a:effectRef>
+          <a:fontRef idx="minor">
+            <a:schemeClr val="lt1"/>
+          </a:fontRef>
+        </p:style>
+        <p:txBody>
+          <a:bodyPr wrap="square" rtlCol="0" anchor="ctr">
+            <a:noAutofit/>
+          </a:bodyPr>
+          <a:lstStyle/>
+          <a:p>
+            <a:pPr marL="0" marR="0" lvl="0" indent="0" algn="ctr" defTabSz="457200" rtl="0" eaLnBrk="1" fontAlgn="auto" latinLnBrk="0" hangingPunct="1">
+              <a:lnSpc>
+                <a:spcPct val="100000"/>
+              </a:lnSpc>
+              <a:spcBef>
+                <a:spcPts val="0"/>
+              </a:spcBef>
+              <a:spcAft>
+                <a:spcPts val="0"/>
+              </a:spcAft>
+              <a:buClrTx/>
+              <a:buSzTx/>
+              <a:buFontTx/>
+              <a:buNone/>
+              <a:tabLst/>
+              <a:defRPr/>
+            </a:pPr>
+            <a:endParaRPr kumimoji="0" lang="en-US" sz="1800" b="0" i="0" u="none" strike="noStrike" kern="1200" cap="none" spc="0" normalizeH="0" baseline="0" noProof="0" dirty="0">
+              <a:ln>
+                <a:noFill/>
+              </a:ln>
+              <a:solidFill>
+                <a:prstClr val="white"/>
+              </a:solidFill>
+              <a:effectLst/>
+              <a:uLnTx/>
+              <a:uFillTx/>
+              <a:latin typeface="Meiryo"/>
+              <a:ea typeface="+mn-ea"/>
+              <a:cs typeface="+mn-cs"/>
+            </a:endParaRPr>
+          </a:p>
+        </p:txBody>
+      </p:sp>
+      <p:sp>
+        <p:nvSpPr>
+          <p:cNvPr id="59" name="Freeform: Shape 58">
+            <a:extLst>
+              <a:ext uri="{FF2B5EF4-FFF2-40B4-BE49-F238E27FC236}">
+                <a16:creationId xmlns:a16="http://schemas.microsoft.com/office/drawing/2014/main" id="{E13520A4-785A-F1C4-A07B-0623F1CFF757}"/>
+              </a:ext>
+              <a:ext uri="{C183D7F6-B498-43B3-948B-1728B52AA6E4}">
+                <adec:decorative xmlns:adec="http://schemas.microsoft.com/office/drawing/2017/decorative" val="1"/>
+              </a:ext>
+            </a:extLst>
+          </p:cNvPr>
+          <p:cNvSpPr>
+            <a:spLocks noGrp="1" noRot="1" noChangeAspect="1" noMove="1" noResize="1" noEditPoints="1" noAdjustHandles="1" noChangeArrowheads="1" noChangeShapeType="1" noTextEdit="1"/>
+          </p:cNvSpPr>
+          <p:nvPr>
+            <p:extLst>
+              <p:ext uri="{386F3935-93C4-4BCD-93E2-E3B085C9AB24}">
+                <p16:designElem xmlns:p16="http://schemas.microsoft.com/office/powerpoint/2015/main" val="1"/>
+              </p:ext>
+            </p:extLst>
+          </p:nvPr>
+        </p:nvSpPr>
+        <p:spPr>
+          <a:xfrm>
+            <a:off x="2925575" y="0"/>
+            <a:ext cx="2486322" cy="6858000"/>
+          </a:xfrm>
+          <a:custGeom>
+            <a:avLst/>
+            <a:gdLst>
+              <a:gd name="connsiteX0" fmla="*/ 879731 w 2521425"/>
+              <a:gd name="connsiteY0" fmla="*/ 0 h 6858000"/>
+              <a:gd name="connsiteX1" fmla="*/ 898402 w 2521425"/>
+              <a:gd name="connsiteY1" fmla="*/ 0 h 6858000"/>
+              <a:gd name="connsiteX2" fmla="*/ 920526 w 2521425"/>
+              <a:gd name="connsiteY2" fmla="*/ 14997 h 6858000"/>
+              <a:gd name="connsiteX3" fmla="*/ 2521425 w 2521425"/>
+              <a:gd name="connsiteY3" fmla="*/ 3621656 h 6858000"/>
+              <a:gd name="connsiteX4" fmla="*/ 647075 w 2521425"/>
+              <a:gd name="connsiteY4" fmla="*/ 6374814 h 6858000"/>
+              <a:gd name="connsiteX5" fmla="*/ 130427 w 2521425"/>
+              <a:gd name="connsiteY5" fmla="*/ 6780599 h 6858000"/>
+              <a:gd name="connsiteX6" fmla="*/ 18671 w 2521425"/>
+              <a:gd name="connsiteY6" fmla="*/ 6858000 h 6858000"/>
+              <a:gd name="connsiteX7" fmla="*/ 0 w 2521425"/>
+              <a:gd name="connsiteY7" fmla="*/ 6858000 h 6858000"/>
+              <a:gd name="connsiteX8" fmla="*/ 111756 w 2521425"/>
+              <a:gd name="connsiteY8" fmla="*/ 6780599 h 6858000"/>
+              <a:gd name="connsiteX9" fmla="*/ 628404 w 2521425"/>
+              <a:gd name="connsiteY9" fmla="*/ 6374814 h 6858000"/>
+              <a:gd name="connsiteX10" fmla="*/ 2502754 w 2521425"/>
+              <a:gd name="connsiteY10" fmla="*/ 3621656 h 6858000"/>
+              <a:gd name="connsiteX11" fmla="*/ 901855 w 2521425"/>
+              <a:gd name="connsiteY11" fmla="*/ 14997 h 6858000"/>
+            </a:gdLst>
+            <a:ahLst/>
+            <a:cxnLst>
+              <a:cxn ang="0">
+                <a:pos x="connsiteX0" y="connsiteY0"/>
+              </a:cxn>
+              <a:cxn ang="0">
+                <a:pos x="connsiteX1" y="connsiteY1"/>
+              </a:cxn>
+              <a:cxn ang="0">
+                <a:pos x="connsiteX2" y="connsiteY2"/>
+              </a:cxn>
+              <a:cxn ang="0">
+                <a:pos x="connsiteX3" y="connsiteY3"/>
+              </a:cxn>
+              <a:cxn ang="0">
+                <a:pos x="connsiteX4" y="connsiteY4"/>
+              </a:cxn>
+              <a:cxn ang="0">
+                <a:pos x="connsiteX5" y="connsiteY5"/>
+              </a:cxn>
+              <a:cxn ang="0">
+                <a:pos x="connsiteX6" y="connsiteY6"/>
+              </a:cxn>
+              <a:cxn ang="0">
+                <a:pos x="connsiteX7" y="connsiteY7"/>
+              </a:cxn>
+              <a:cxn ang="0">
+                <a:pos x="connsiteX8" y="connsiteY8"/>
+              </a:cxn>
+              <a:cxn ang="0">
+                <a:pos x="connsiteX9" y="connsiteY9"/>
+              </a:cxn>
+              <a:cxn ang="0">
+                <a:pos x="connsiteX10" y="connsiteY10"/>
+              </a:cxn>
+              <a:cxn ang="0">
+                <a:pos x="connsiteX11" y="connsiteY11"/>
+              </a:cxn>
+            </a:cxnLst>
+            <a:rect l="l" t="t" r="r" b="b"/>
+            <a:pathLst>
+              <a:path w="2521425" h="6858000">
+                <a:moveTo>
+                  <a:pt x="879731" y="0"/>
+                </a:moveTo>
+                <a:lnTo>
+                  <a:pt x="898402" y="0"/>
+                </a:lnTo>
+                <a:lnTo>
+                  <a:pt x="920526" y="14997"/>
+                </a:lnTo>
+                <a:cubicBezTo>
+                  <a:pt x="1947689" y="754641"/>
+                  <a:pt x="2521425" y="2093192"/>
+                  <a:pt x="2521425" y="3621656"/>
+                </a:cubicBezTo>
+                <a:cubicBezTo>
+                  <a:pt x="2521425" y="4969131"/>
+                  <a:pt x="1592700" y="5602839"/>
+                  <a:pt x="647075" y="6374814"/>
+                </a:cubicBezTo>
+                <a:cubicBezTo>
+                  <a:pt x="474872" y="6515397"/>
+                  <a:pt x="304245" y="6653108"/>
+                  <a:pt x="130427" y="6780599"/>
+                </a:cubicBezTo>
+                <a:lnTo>
+                  <a:pt x="18671" y="6858000"/>
+                </a:lnTo>
+                <a:lnTo>
+                  <a:pt x="0" y="6858000"/>
+                </a:lnTo>
+                <a:lnTo>
+                  <a:pt x="111756" y="6780599"/>
+                </a:lnTo>
+                <a:cubicBezTo>
+                  <a:pt x="285574" y="6653108"/>
+                  <a:pt x="456201" y="6515397"/>
+                  <a:pt x="628404" y="6374814"/>
+                </a:cubicBezTo>
+                <a:cubicBezTo>
+                  <a:pt x="1574029" y="5602839"/>
+                  <a:pt x="2502754" y="4969131"/>
+                  <a:pt x="2502754" y="3621656"/>
+                </a:cubicBezTo>
+                <a:cubicBezTo>
+                  <a:pt x="2502754" y="2093192"/>
+                  <a:pt x="1929018" y="754641"/>
+                  <a:pt x="901855" y="14997"/>
+                </a:cubicBezTo>
+                <a:close/>
+              </a:path>
+            </a:pathLst>
+          </a:custGeom>
+          <a:solidFill>
+            <a:srgbClr val="FFFFFF">
+              <a:alpha val="50000"/>
+            </a:srgbClr>
+          </a:solidFill>
+          <a:ln>
+            <a:noFill/>
+          </a:ln>
+        </p:spPr>
+        <p:style>
+          <a:lnRef idx="2">
+            <a:schemeClr val="accent1">
+              <a:shade val="50000"/>
+            </a:schemeClr>
+          </a:lnRef>
+          <a:fillRef idx="1">
+            <a:schemeClr val="accent1"/>
+          </a:fillRef>
+          <a:effectRef idx="0">
+            <a:schemeClr val="accent1"/>
+          </a:effectRef>
+          <a:fontRef idx="minor">
+            <a:schemeClr val="lt1"/>
+          </a:fontRef>
+        </p:style>
+        <p:txBody>
+          <a:bodyPr wrap="square" rtlCol="0" anchor="ctr">
+            <a:noAutofit/>
+          </a:bodyPr>
+          <a:lstStyle/>
+          <a:p>
+            <a:pPr marL="0" marR="0" lvl="0" indent="0" algn="ctr" defTabSz="914400" rtl="0" eaLnBrk="1" fontAlgn="auto" latinLnBrk="0" hangingPunct="1">
+              <a:lnSpc>
+                <a:spcPct val="100000"/>
+              </a:lnSpc>
+              <a:spcBef>
+                <a:spcPts val="0"/>
+              </a:spcBef>
+              <a:spcAft>
+                <a:spcPts val="0"/>
+              </a:spcAft>
+              <a:buClrTx/>
+              <a:buSzTx/>
+              <a:buFontTx/>
+              <a:buNone/>
+              <a:tabLst/>
+              <a:defRPr/>
+            </a:pPr>
+            <a:endParaRPr kumimoji="0" lang="en-US" sz="1800" b="0" i="0" u="none" strike="noStrike" kern="1200" cap="none" spc="0" normalizeH="0" baseline="0" noProof="0" dirty="0">
+              <a:ln>
+                <a:noFill/>
+              </a:ln>
+              <a:solidFill>
+                <a:prstClr val="white"/>
+              </a:solidFill>
+              <a:effectLst/>
+              <a:uLnTx/>
+              <a:uFillTx/>
+              <a:latin typeface="Meiryo"/>
+              <a:ea typeface="+mn-ea"/>
+              <a:cs typeface="+mn-cs"/>
+            </a:endParaRPr>
+          </a:p>
+        </p:txBody>
+      </p:sp>
+      <p:pic>
+        <p:nvPicPr>
+          <p:cNvPr id="4" name="Picture 3">
+            <a:extLst>
+              <a:ext uri="{FF2B5EF4-FFF2-40B4-BE49-F238E27FC236}">
+                <a16:creationId xmlns:a16="http://schemas.microsoft.com/office/drawing/2014/main" id="{AACCDCC5-4CEF-961D-37A4-189CC2B5D2F9}"/>
+              </a:ext>
+            </a:extLst>
+          </p:cNvPr>
+          <p:cNvPicPr>
+            <a:picLocks noChangeAspect="1"/>
+          </p:cNvPicPr>
+          <p:nvPr/>
+        </p:nvPicPr>
+        <p:blipFill>
+          <a:blip r:embed="rId2"/>
+          <a:srcRect l="24089"/>
+          <a:stretch/>
+        </p:blipFill>
+        <p:spPr>
+          <a:xfrm>
+            <a:off x="-1507" y="10"/>
+            <a:ext cx="5205951" cy="6857990"/>
+          </a:xfrm>
+          <a:custGeom>
+            <a:avLst/>
+            <a:gdLst/>
+            <a:ahLst/>
+            <a:cxnLst/>
+            <a:rect l="l" t="t" r="r" b="b"/>
+            <a:pathLst>
+              <a:path w="5205951" h="6858000">
+                <a:moveTo>
+                  <a:pt x="0" y="0"/>
+                </a:moveTo>
+                <a:lnTo>
+                  <a:pt x="1709529" y="0"/>
+                </a:lnTo>
+                <a:lnTo>
+                  <a:pt x="2489695" y="0"/>
+                </a:lnTo>
+                <a:lnTo>
+                  <a:pt x="3582928" y="0"/>
+                </a:lnTo>
+                <a:lnTo>
+                  <a:pt x="3605052" y="14997"/>
+                </a:lnTo>
+                <a:cubicBezTo>
+                  <a:pt x="4632215" y="754641"/>
+                  <a:pt x="5205951" y="2093192"/>
+                  <a:pt x="5205951" y="3621656"/>
+                </a:cubicBezTo>
+                <a:cubicBezTo>
+                  <a:pt x="5205951" y="4969131"/>
+                  <a:pt x="4277226" y="5602839"/>
+                  <a:pt x="3331601" y="6374814"/>
+                </a:cubicBezTo>
+                <a:cubicBezTo>
+                  <a:pt x="3159398" y="6515397"/>
+                  <a:pt x="2988771" y="6653108"/>
+                  <a:pt x="2814953" y="6780599"/>
+                </a:cubicBezTo>
+                <a:lnTo>
+                  <a:pt x="2703197" y="6858000"/>
+                </a:lnTo>
+                <a:lnTo>
+                  <a:pt x="2489695" y="6858000"/>
+                </a:lnTo>
+                <a:lnTo>
+                  <a:pt x="1709529" y="6858000"/>
+                </a:lnTo>
+                <a:lnTo>
+                  <a:pt x="0" y="6858000"/>
+                </a:lnTo>
+                <a:close/>
+              </a:path>
+            </a:pathLst>
+          </a:custGeom>
+        </p:spPr>
+      </p:pic>
+      <p:sp>
+        <p:nvSpPr>
+          <p:cNvPr id="61" name="Freeform: Shape 60">
+            <a:extLst>
+              <a:ext uri="{FF2B5EF4-FFF2-40B4-BE49-F238E27FC236}">
+                <a16:creationId xmlns:a16="http://schemas.microsoft.com/office/drawing/2014/main" id="{8F49B63D-2A64-7E90-0452-E8039DDF1B6C}"/>
+              </a:ext>
+              <a:ext uri="{C183D7F6-B498-43B3-948B-1728B52AA6E4}">
+                <adec:decorative xmlns:adec="http://schemas.microsoft.com/office/drawing/2017/decorative" val="1"/>
+              </a:ext>
+            </a:extLst>
+          </p:cNvPr>
+          <p:cNvSpPr>
+            <a:spLocks noGrp="1" noRot="1" noChangeAspect="1" noMove="1" noResize="1" noEditPoints="1" noAdjustHandles="1" noChangeArrowheads="1" noChangeShapeType="1" noTextEdit="1"/>
+          </p:cNvSpPr>
+          <p:nvPr>
+            <p:extLst>
+              <p:ext uri="{386F3935-93C4-4BCD-93E2-E3B085C9AB24}">
+                <p16:designElem xmlns:p16="http://schemas.microsoft.com/office/powerpoint/2015/main" val="1"/>
+              </p:ext>
+            </p:extLst>
+          </p:nvPr>
+        </p:nvSpPr>
+        <p:spPr>
+          <a:xfrm>
+            <a:off x="2359072" y="0"/>
+            <a:ext cx="2845372" cy="6858000"/>
+          </a:xfrm>
+          <a:custGeom>
+            <a:avLst/>
+            <a:gdLst>
+              <a:gd name="connsiteX0" fmla="*/ 939908 w 2845372"/>
+              <a:gd name="connsiteY0" fmla="*/ 0 h 6858000"/>
+              <a:gd name="connsiteX1" fmla="*/ 1222349 w 2845372"/>
+              <a:gd name="connsiteY1" fmla="*/ 0 h 6858000"/>
+              <a:gd name="connsiteX2" fmla="*/ 1244473 w 2845372"/>
+              <a:gd name="connsiteY2" fmla="*/ 14997 h 6858000"/>
+              <a:gd name="connsiteX3" fmla="*/ 2845372 w 2845372"/>
+              <a:gd name="connsiteY3" fmla="*/ 3621656 h 6858000"/>
+              <a:gd name="connsiteX4" fmla="*/ 971022 w 2845372"/>
+              <a:gd name="connsiteY4" fmla="*/ 6374814 h 6858000"/>
+              <a:gd name="connsiteX5" fmla="*/ 454374 w 2845372"/>
+              <a:gd name="connsiteY5" fmla="*/ 6780599 h 6858000"/>
+              <a:gd name="connsiteX6" fmla="*/ 342618 w 2845372"/>
+              <a:gd name="connsiteY6" fmla="*/ 6858000 h 6858000"/>
+              <a:gd name="connsiteX7" fmla="*/ 129116 w 2845372"/>
+              <a:gd name="connsiteY7" fmla="*/ 6858000 h 6858000"/>
+              <a:gd name="connsiteX8" fmla="*/ 0 w 2845372"/>
+              <a:gd name="connsiteY8" fmla="*/ 6858000 h 6858000"/>
+              <a:gd name="connsiteX9" fmla="*/ 119401 w 2845372"/>
+              <a:gd name="connsiteY9" fmla="*/ 6780599 h 6858000"/>
+              <a:gd name="connsiteX10" fmla="*/ 671389 w 2845372"/>
+              <a:gd name="connsiteY10" fmla="*/ 6374814 h 6858000"/>
+              <a:gd name="connsiteX11" fmla="*/ 2673952 w 2845372"/>
+              <a:gd name="connsiteY11" fmla="*/ 3621656 h 6858000"/>
+              <a:gd name="connsiteX12" fmla="*/ 963545 w 2845372"/>
+              <a:gd name="connsiteY12" fmla="*/ 14997 h 6858000"/>
+            </a:gdLst>
+            <a:ahLst/>
+            <a:cxnLst>
+              <a:cxn ang="0">
+                <a:pos x="connsiteX0" y="connsiteY0"/>
+              </a:cxn>
+              <a:cxn ang="0">
+                <a:pos x="connsiteX1" y="connsiteY1"/>
+              </a:cxn>
+              <a:cxn ang="0">
+                <a:pos x="connsiteX2" y="connsiteY2"/>
+              </a:cxn>
+              <a:cxn ang="0">
+                <a:pos x="connsiteX3" y="connsiteY3"/>
+              </a:cxn>
+              <a:cxn ang="0">
+                <a:pos x="connsiteX4" y="connsiteY4"/>
+              </a:cxn>
+              <a:cxn ang="0">
+                <a:pos x="connsiteX5" y="connsiteY5"/>
+              </a:cxn>
+              <a:cxn ang="0">
+                <a:pos x="connsiteX6" y="connsiteY6"/>
+              </a:cxn>
+              <a:cxn ang="0">
+                <a:pos x="connsiteX7" y="connsiteY7"/>
+              </a:cxn>
+              <a:cxn ang="0">
+                <a:pos x="connsiteX8" y="connsiteY8"/>
+              </a:cxn>
+              <a:cxn ang="0">
+                <a:pos x="connsiteX9" y="connsiteY9"/>
+              </a:cxn>
+              <a:cxn ang="0">
+                <a:pos x="connsiteX10" y="connsiteY10"/>
+              </a:cxn>
+              <a:cxn ang="0">
+                <a:pos x="connsiteX11" y="connsiteY11"/>
+              </a:cxn>
+              <a:cxn ang="0">
+                <a:pos x="connsiteX12" y="connsiteY12"/>
+              </a:cxn>
+            </a:cxnLst>
+            <a:rect l="l" t="t" r="r" b="b"/>
+            <a:pathLst>
+              <a:path w="2845372" h="6858000">
+                <a:moveTo>
+                  <a:pt x="939908" y="0"/>
+                </a:moveTo>
+                <a:lnTo>
+                  <a:pt x="1222349" y="0"/>
+                </a:lnTo>
+                <a:lnTo>
+                  <a:pt x="1244473" y="14997"/>
+                </a:lnTo>
+                <a:cubicBezTo>
+                  <a:pt x="2271636" y="754641"/>
+                  <a:pt x="2845372" y="2093192"/>
+                  <a:pt x="2845372" y="3621656"/>
+                </a:cubicBezTo>
+                <a:cubicBezTo>
+                  <a:pt x="2845372" y="4969131"/>
+                  <a:pt x="1916647" y="5602839"/>
+                  <a:pt x="971022" y="6374814"/>
+                </a:cubicBezTo>
+                <a:cubicBezTo>
+                  <a:pt x="798819" y="6515397"/>
+                  <a:pt x="628192" y="6653108"/>
+                  <a:pt x="454374" y="6780599"/>
+                </a:cubicBezTo>
+                <a:lnTo>
+                  <a:pt x="342618" y="6858000"/>
+                </a:lnTo>
+                <a:lnTo>
+                  <a:pt x="129116" y="6858000"/>
+                </a:lnTo>
+                <a:lnTo>
+                  <a:pt x="0" y="6858000"/>
+                </a:lnTo>
+                <a:lnTo>
+                  <a:pt x="119401" y="6780599"/>
+                </a:lnTo>
+                <a:cubicBezTo>
+                  <a:pt x="305108" y="6653108"/>
+                  <a:pt x="487407" y="6515397"/>
+                  <a:pt x="671389" y="6374814"/>
+                </a:cubicBezTo>
+                <a:cubicBezTo>
+                  <a:pt x="1681699" y="5602839"/>
+                  <a:pt x="2673952" y="4969131"/>
+                  <a:pt x="2673952" y="3621656"/>
+                </a:cubicBezTo>
+                <a:cubicBezTo>
+                  <a:pt x="2673952" y="2093192"/>
+                  <a:pt x="2060970" y="754641"/>
+                  <a:pt x="963545" y="14997"/>
+                </a:cubicBezTo>
+                <a:close/>
+              </a:path>
+            </a:pathLst>
+          </a:custGeom>
+          <a:solidFill>
+            <a:srgbClr val="FFFFFF">
+              <a:alpha val="60000"/>
+            </a:srgbClr>
+          </a:solidFill>
+          <a:ln>
+            <a:noFill/>
+          </a:ln>
+        </p:spPr>
+        <p:style>
+          <a:lnRef idx="2">
+            <a:schemeClr val="accent1">
+              <a:shade val="50000"/>
+            </a:schemeClr>
+          </a:lnRef>
+          <a:fillRef idx="1">
+            <a:schemeClr val="accent1"/>
+          </a:fillRef>
+          <a:effectRef idx="0">
+            <a:schemeClr val="accent1"/>
+          </a:effectRef>
+          <a:fontRef idx="minor">
+            <a:schemeClr val="lt1"/>
+          </a:fontRef>
+        </p:style>
+        <p:txBody>
+          <a:bodyPr wrap="square" rtlCol="0" anchor="ctr">
+            <a:noAutofit/>
+          </a:bodyPr>
+          <a:lstStyle/>
+          <a:p>
+            <a:pPr algn="ctr"/>
+            <a:endParaRPr lang="en-US" dirty="0"/>
+          </a:p>
+        </p:txBody>
+      </p:sp>
+      <p:pic>
+        <p:nvPicPr>
+          <p:cNvPr id="5" name="Picture 4" descr="A green dot in a black background&#10;&#10;Description automatically generated">
+            <a:extLst>
+              <a:ext uri="{FF2B5EF4-FFF2-40B4-BE49-F238E27FC236}">
+                <a16:creationId xmlns:a16="http://schemas.microsoft.com/office/drawing/2014/main" id="{8F728838-FA25-504A-B8D9-D935C4B85824}"/>
+              </a:ext>
+            </a:extLst>
+          </p:cNvPr>
+          <p:cNvPicPr>
+            <a:picLocks noChangeAspect="1"/>
+          </p:cNvPicPr>
+          <p:nvPr/>
+        </p:nvPicPr>
+        <p:blipFill>
+          <a:blip r:embed="rId3"/>
+          <a:stretch>
+            <a:fillRect/>
+          </a:stretch>
+        </p:blipFill>
+        <p:spPr>
+          <a:xfrm>
+            <a:off x="0" y="6082506"/>
+            <a:ext cx="775494" cy="775494"/>
+          </a:xfrm>
+          <a:prstGeom prst="rect">
+            <a:avLst/>
+          </a:prstGeom>
+          <a:noFill/>
+        </p:spPr>
+      </p:pic>
+    </p:spTree>
+    <p:extLst>
+      <p:ext uri="{BB962C8B-B14F-4D97-AF65-F5344CB8AC3E}">
+        <p14:creationId xmlns:p14="http://schemas.microsoft.com/office/powerpoint/2010/main" val="2525989253"/>
+      </p:ext>
+    </p:extLst>
+  </p:cSld>
+  <p:clrMapOvr>
+    <a:masterClrMapping/>
+  </p:clrMapOvr>
+  <p:timing>
+    <p:tnLst>
+      <p:par>
+        <p:cTn id="1" dur="indefinite" restart="never" nodeType="tmRoot">
+          <p:childTnLst>
+            <p:seq concurrent="1" nextAc="seek">
+              <p:cTn id="2" dur="indefinite" nodeType="mainSeq">
+                <p:childTnLst>
+                  <p:par>
+                    <p:cTn id="3" fill="hold">
+                      <p:stCondLst>
+                        <p:cond delay="indefinite"/>
+                        <p:cond evt="onBegin" delay="0">
+                          <p:tn val="2"/>
+                        </p:cond>
+                      </p:stCondLst>
+                      <p:childTnLst>
+                        <p:par>
+                          <p:cTn id="4" fill="hold">
+                            <p:stCondLst>
+                              <p:cond delay="0"/>
+                            </p:stCondLst>
+                            <p:childTnLst>
+                              <p:par>
+                                <p:cTn id="5" presetID="10" presetClass="entr" presetSubtype="0" fill="hold" grpId="0" nodeType="withEffect">
+                                  <p:stCondLst>
+                                    <p:cond delay="1000"/>
+                                  </p:stCondLst>
+                                  <p:iterate>
+                                    <p:tmPct val="10000"/>
+                                  </p:iterate>
+                                  <p:childTnLst>
+                                    <p:set>
+                                      <p:cBhvr>
+                                        <p:cTn id="6" dur="1" fill="hold">
+                                          <p:stCondLst>
+                                            <p:cond delay="0"/>
+                                          </p:stCondLst>
+                                        </p:cTn>
+                                        <p:tgtEl>
+                                          <p:spTgt spid="2"/>
+                                        </p:tgtEl>
+                                        <p:attrNameLst>
+                                          <p:attrName>style.visibility</p:attrName>
+                                        </p:attrNameLst>
+                                      </p:cBhvr>
+                                      <p:to>
+                                        <p:strVal val="visible"/>
+                                      </p:to>
+                                    </p:set>
+                                    <p:animEffect transition="in" filter="fade">
+                                      <p:cBhvr>
+                                        <p:cTn id="7" dur="700"/>
+                                        <p:tgtEl>
+                                          <p:spTgt spid="2"/>
+                                        </p:tgtEl>
+                                      </p:cBhvr>
+                                    </p:animEffect>
+                                  </p:childTnLst>
+                                </p:cTn>
+                              </p:par>
+                            </p:childTnLst>
+                          </p:cTn>
+                        </p:par>
+                      </p:childTnLst>
+                    </p:cTn>
+                  </p:par>
+                </p:childTnLst>
+              </p:cTn>
+              <p:prevCondLst>
+                <p:cond evt="onPrev" delay="0">
+                  <p:tgtEl>
+                    <p:sldTgt/>
+                  </p:tgtEl>
+                </p:cond>
+              </p:prevCondLst>
+              <p:nextCondLst>
+                <p:cond evt="onNext" delay="0">
+                  <p:tgtEl>
+                    <p:sldTgt/>
+                  </p:tgtEl>
+                </p:cond>
+              </p:nextCondLst>
+            </p:seq>
+          </p:childTnLst>
+        </p:cTn>
+      </p:par>
+    </p:tnLst>
+    <p:bldLst>
+      <p:bldP spid="2" grpId="0"/>
+    </p:bldLst>
+  </p:timing>
+</p:sld>
+</file>
+
+<file path=ppt/slides/slide14.xml><?xml version="1.0" encoding="utf-8"?>
 <p:sld xmlns:a="http://schemas.openxmlformats.org/drawingml/2006/main" xmlns:r="http://schemas.openxmlformats.org/officeDocument/2006/relationships" xmlns:p="http://schemas.openxmlformats.org/presentationml/2006/main">
   <p:cSld>
     <p:bg>
@@ -6854,7 +7970,7 @@
                 <a:latin typeface="Calibri" panose="020F0502020204030204" pitchFamily="34" charset="0"/>
                 <a:cs typeface="Calibri" panose="020F0502020204030204" pitchFamily="34" charset="0"/>
               </a:rPr>
-              <a:t>Fixed Window Algorithm</a:t>
+              <a:t>What is Rate Limiting</a:t>
             </a:r>
             <a:endParaRPr lang="en-US" sz="4000" dirty="0"/>
           </a:p>
@@ -6916,63 +8032,7 @@
           <a:bodyPr/>
           <a:lstStyle/>
           <a:p>
-            <a:pPr algn="l">
-              <a:buFont typeface="Arial" panose="020B0604020202020204" pitchFamily="34" charset="0"/>
-              <a:buChar char="•"/>
-            </a:pPr>
-            <a:r>
-              <a:rPr lang="en-GB" b="0" i="0" u="none" strike="noStrike" dirty="0">
-                <a:solidFill>
-                  <a:srgbClr val="000000"/>
-                </a:solidFill>
-                <a:effectLst/>
-              </a:rPr>
-              <a:t>Divides time into fixed intervals (e.g., 1 minute).</a:t>
-            </a:r>
-          </a:p>
-          <a:p>
-            <a:pPr algn="l">
-              <a:buFont typeface="Arial" panose="020B0604020202020204" pitchFamily="34" charset="0"/>
-              <a:buChar char="•"/>
-            </a:pPr>
-            <a:r>
-              <a:rPr lang="en-GB" b="0" i="0" u="none" strike="noStrike" dirty="0">
-                <a:solidFill>
-                  <a:srgbClr val="000000"/>
-                </a:solidFill>
-                <a:effectLst/>
-              </a:rPr>
-              <a:t>Pros: Simple implementation.</a:t>
-            </a:r>
-          </a:p>
-          <a:p>
-            <a:pPr algn="l">
-              <a:buFont typeface="Arial" panose="020B0604020202020204" pitchFamily="34" charset="0"/>
-              <a:buChar char="•"/>
-            </a:pPr>
-            <a:r>
-              <a:rPr lang="en-GB" b="0" i="0" u="none" strike="noStrike" dirty="0">
-                <a:solidFill>
-                  <a:srgbClr val="000000"/>
-                </a:solidFill>
-                <a:effectLst/>
-              </a:rPr>
-              <a:t>Cons: Potential for burst traffic at interval edges.</a:t>
-            </a:r>
-          </a:p>
-          <a:p>
-            <a:pPr algn="l">
-              <a:buFont typeface="Arial" panose="020B0604020202020204" pitchFamily="34" charset="0"/>
-              <a:buChar char="•"/>
-            </a:pPr>
-            <a:endParaRPr lang="en-GB" dirty="0">
-              <a:solidFill>
-                <a:srgbClr val="000000"/>
-              </a:solidFill>
-            </a:endParaRPr>
-          </a:p>
-          <a:p>
-            <a:pPr marL="0" indent="0">
+            <a:pPr marL="0" indent="0" algn="l">
               <a:buNone/>
             </a:pPr>
             <a:r>
@@ -6981,42 +8041,18 @@
                   <a:srgbClr val="000000"/>
                 </a:solidFill>
                 <a:effectLst/>
+                <a:latin typeface="Space Grotesk"/>
               </a:rPr>
-              <a:t>Useful command in Jedis:</a:t>
+              <a:t>Rate Limiting entails techniques to regulate the number of requests a particular client can make against a networked service. It caps the total number and/or the frequency of requests.</a:t>
             </a:r>
-          </a:p>
-          <a:p>
-            <a:pPr marL="0" indent="0">
-              <a:buNone/>
-            </a:pPr>
-            <a:r>
-              <a:rPr lang="en-GB" b="0" i="0" u="none" strike="noStrike" dirty="0">
-                <a:solidFill>
-                  <a:srgbClr val="000000"/>
-                </a:solidFill>
-                <a:effectLst/>
-              </a:rPr>
-              <a:t>INCR and EXPIRE</a:t>
-            </a:r>
-          </a:p>
-          <a:p>
-            <a:pPr algn="l">
-              <a:buFont typeface="Arial" panose="020B0604020202020204" pitchFamily="34" charset="0"/>
-              <a:buChar char="•"/>
-            </a:pPr>
-            <a:endParaRPr lang="en-GB" b="0" i="0" u="none" strike="noStrike" dirty="0">
-              <a:solidFill>
-                <a:srgbClr val="000000"/>
-              </a:solidFill>
-              <a:effectLst/>
-            </a:endParaRPr>
+            <a:endParaRPr lang="en-UA" dirty="0"/>
           </a:p>
         </p:txBody>
       </p:sp>
     </p:spTree>
     <p:extLst>
       <p:ext uri="{BB962C8B-B14F-4D97-AF65-F5344CB8AC3E}">
-        <p14:creationId xmlns:p14="http://schemas.microsoft.com/office/powerpoint/2010/main" val="3595799763"/>
+        <p14:creationId xmlns:p14="http://schemas.microsoft.com/office/powerpoint/2010/main" val="731202426"/>
       </p:ext>
     </p:extLst>
   </p:cSld>
@@ -7026,7 +8062,7 @@
 </p:sld>
 </file>
 
-<file path=ppt/slides/slide14.xml><?xml version="1.0" encoding="utf-8"?>
+<file path=ppt/slides/slide15.xml><?xml version="1.0" encoding="utf-8"?>
 <p:sld xmlns:a="http://schemas.openxmlformats.org/drawingml/2006/main" xmlns:r="http://schemas.openxmlformats.org/officeDocument/2006/relationships" xmlns:p="http://schemas.openxmlformats.org/presentationml/2006/main">
   <p:cSld>
     <p:bg>
@@ -7330,40 +8366,133 @@
           </a:prstGeom>
         </p:spPr>
       </p:pic>
-      <p:pic>
-        <p:nvPicPr>
-          <p:cNvPr id="6" name="Picture 5">
+      <p:sp>
+        <p:nvSpPr>
+          <p:cNvPr id="8" name="Content Placeholder 7">
             <a:extLst>
               <a:ext uri="{FF2B5EF4-FFF2-40B4-BE49-F238E27FC236}">
-                <a16:creationId xmlns:a16="http://schemas.microsoft.com/office/drawing/2014/main" id="{7DA56234-DC09-E3C9-7225-F70AC0A70D8C}"/>
+                <a16:creationId xmlns:a16="http://schemas.microsoft.com/office/drawing/2014/main" id="{B12E6721-8524-1777-F051-7754B9B96C07}"/>
               </a:ext>
             </a:extLst>
           </p:cNvPr>
-          <p:cNvPicPr>
-            <a:picLocks noChangeAspect="1"/>
-          </p:cNvPicPr>
-          <p:nvPr/>
-        </p:nvPicPr>
-        <p:blipFill>
-          <a:blip r:embed="rId4"/>
-          <a:stretch>
-            <a:fillRect/>
-          </a:stretch>
-        </p:blipFill>
+          <p:cNvSpPr>
+            <a:spLocks noGrp="1"/>
+          </p:cNvSpPr>
+          <p:nvPr>
+            <p:ph idx="1"/>
+          </p:nvPr>
+        </p:nvSpPr>
         <p:spPr>
           <a:xfrm>
-            <a:off x="1895146" y="2042205"/>
-            <a:ext cx="8401708" cy="3649678"/>
+            <a:off x="838200" y="2208943"/>
+            <a:ext cx="10515600" cy="3968019"/>
           </a:xfrm>
-          <a:prstGeom prst="rect">
-            <a:avLst/>
-          </a:prstGeom>
         </p:spPr>
-      </p:pic>
+        <p:txBody>
+          <a:bodyPr/>
+          <a:lstStyle/>
+          <a:p>
+            <a:pPr algn="l">
+              <a:buFont typeface="Arial" panose="020B0604020202020204" pitchFamily="34" charset="0"/>
+              <a:buChar char="•"/>
+            </a:pPr>
+            <a:r>
+              <a:rPr lang="en-GB" b="0" i="0" u="none" strike="noStrike" dirty="0">
+                <a:solidFill>
+                  <a:srgbClr val="000000"/>
+                </a:solidFill>
+                <a:effectLst/>
+              </a:rPr>
+              <a:t>Divides time into fixed intervals (e.g., 1 minute).</a:t>
+            </a:r>
+          </a:p>
+          <a:p>
+            <a:pPr algn="l">
+              <a:buFont typeface="Arial" panose="020B0604020202020204" pitchFamily="34" charset="0"/>
+              <a:buChar char="•"/>
+            </a:pPr>
+            <a:r>
+              <a:rPr lang="en-GB" b="0" i="0" u="none" strike="noStrike" dirty="0">
+                <a:solidFill>
+                  <a:srgbClr val="000000"/>
+                </a:solidFill>
+                <a:effectLst/>
+              </a:rPr>
+              <a:t>Pros: Simple implementation.</a:t>
+            </a:r>
+          </a:p>
+          <a:p>
+            <a:pPr algn="l">
+              <a:buFont typeface="Arial" panose="020B0604020202020204" pitchFamily="34" charset="0"/>
+              <a:buChar char="•"/>
+            </a:pPr>
+            <a:r>
+              <a:rPr lang="en-GB" b="0" i="0" u="none" strike="noStrike" dirty="0">
+                <a:solidFill>
+                  <a:srgbClr val="000000"/>
+                </a:solidFill>
+                <a:effectLst/>
+              </a:rPr>
+              <a:t>Cons: Potential for burst traffic at interval edges.</a:t>
+            </a:r>
+          </a:p>
+          <a:p>
+            <a:pPr algn="l">
+              <a:buFont typeface="Arial" panose="020B0604020202020204" pitchFamily="34" charset="0"/>
+              <a:buChar char="•"/>
+            </a:pPr>
+            <a:endParaRPr lang="en-GB" dirty="0">
+              <a:solidFill>
+                <a:srgbClr val="000000"/>
+              </a:solidFill>
+            </a:endParaRPr>
+          </a:p>
+          <a:p>
+            <a:pPr marL="0" indent="0">
+              <a:buNone/>
+            </a:pPr>
+            <a:r>
+              <a:rPr lang="en-GB" b="0" i="0" u="none" strike="noStrike" dirty="0">
+                <a:solidFill>
+                  <a:srgbClr val="000000"/>
+                </a:solidFill>
+                <a:effectLst/>
+              </a:rPr>
+              <a:t>Useful command in Jedis:</a:t>
+            </a:r>
+          </a:p>
+          <a:p>
+            <a:pPr marL="0" indent="0">
+              <a:buNone/>
+            </a:pPr>
+            <a:r>
+              <a:rPr lang="en-GB" b="0" i="0" u="none" strike="noStrike" dirty="0">
+                <a:solidFill>
+                  <a:srgbClr val="000000"/>
+                </a:solidFill>
+                <a:effectLst/>
+              </a:rPr>
+              <a:t>INCR and EXPIRE</a:t>
+            </a:r>
+          </a:p>
+          <a:p>
+            <a:pPr algn="l">
+              <a:buFont typeface="Arial" panose="020B0604020202020204" pitchFamily="34" charset="0"/>
+              <a:buChar char="•"/>
+            </a:pPr>
+            <a:endParaRPr lang="en-GB" b="0" i="0" u="none" strike="noStrike" dirty="0">
+              <a:solidFill>
+                <a:srgbClr val="000000"/>
+              </a:solidFill>
+              <a:effectLst/>
+            </a:endParaRPr>
+          </a:p>
+        </p:txBody>
+      </p:sp>
     </p:spTree>
     <p:extLst>
       <p:ext uri="{BB962C8B-B14F-4D97-AF65-F5344CB8AC3E}">
-        <p14:creationId xmlns:p14="http://schemas.microsoft.com/office/powerpoint/2010/main" val="2736861637"/>
+        <p14:creationId xmlns:p14="http://schemas.microsoft.com/office/powerpoint/2010/main" val="3595799763"/>
       </p:ext>
     </p:extLst>
   </p:cSld>
@@ -7373,7 +8502,7 @@
 </p:sld>
 </file>
 
-<file path=ppt/slides/slide15.xml><?xml version="1.0" encoding="utf-8"?>
+<file path=ppt/slides/slide16.xml><?xml version="1.0" encoding="utf-8"?>
 <p:sld xmlns:a="http://schemas.openxmlformats.org/drawingml/2006/main" xmlns:r="http://schemas.openxmlformats.org/officeDocument/2006/relationships" xmlns:p="http://schemas.openxmlformats.org/presentationml/2006/main">
   <p:cSld>
     <p:bg>
@@ -7641,7 +8770,7 @@
                 <a:latin typeface="Calibri" panose="020F0502020204030204" pitchFamily="34" charset="0"/>
                 <a:cs typeface="Calibri" panose="020F0502020204030204" pitchFamily="34" charset="0"/>
               </a:rPr>
-              <a:t>Sliding Window Algorithm</a:t>
+              <a:t>Fixed Window Algorithm</a:t>
             </a:r>
             <a:endParaRPr lang="en-US" sz="4000" dirty="0"/>
           </a:p>
@@ -7677,118 +8806,40 @@
           </a:prstGeom>
         </p:spPr>
       </p:pic>
-      <p:sp>
-        <p:nvSpPr>
-          <p:cNvPr id="8" name="Content Placeholder 7">
+      <p:pic>
+        <p:nvPicPr>
+          <p:cNvPr id="6" name="Picture 5">
             <a:extLst>
               <a:ext uri="{FF2B5EF4-FFF2-40B4-BE49-F238E27FC236}">
-                <a16:creationId xmlns:a16="http://schemas.microsoft.com/office/drawing/2014/main" id="{B12E6721-8524-1777-F051-7754B9B96C07}"/>
+                <a16:creationId xmlns:a16="http://schemas.microsoft.com/office/drawing/2014/main" id="{7DA56234-DC09-E3C9-7225-F70AC0A70D8C}"/>
               </a:ext>
             </a:extLst>
           </p:cNvPr>
-          <p:cNvSpPr>
-            <a:spLocks noGrp="1"/>
-          </p:cNvSpPr>
-          <p:nvPr>
-            <p:ph idx="1"/>
-          </p:nvPr>
-        </p:nvSpPr>
+          <p:cNvPicPr>
+            <a:picLocks noChangeAspect="1"/>
+          </p:cNvPicPr>
+          <p:nvPr/>
+        </p:nvPicPr>
+        <p:blipFill>
+          <a:blip r:embed="rId4"/>
+          <a:stretch>
+            <a:fillRect/>
+          </a:stretch>
+        </p:blipFill>
         <p:spPr>
           <a:xfrm>
-            <a:off x="838200" y="2208943"/>
-            <a:ext cx="10515600" cy="3968019"/>
+            <a:off x="1895146" y="2042205"/>
+            <a:ext cx="8401708" cy="3649678"/>
           </a:xfrm>
+          <a:prstGeom prst="rect">
+            <a:avLst/>
+          </a:prstGeom>
         </p:spPr>
-        <p:txBody>
-          <a:bodyPr>
-            <a:normAutofit/>
-          </a:bodyPr>
-          <a:lstStyle/>
-          <a:p>
-            <a:pPr algn="l">
-              <a:buFont typeface="Arial" panose="020B0604020202020204" pitchFamily="34" charset="0"/>
-              <a:buChar char="•"/>
-            </a:pPr>
-            <a:r>
-              <a:rPr lang="en-GB" b="0" i="0" u="none" strike="noStrike" dirty="0">
-                <a:solidFill>
-                  <a:srgbClr val="000000"/>
-                </a:solidFill>
-                <a:effectLst/>
-              </a:rPr>
-              <a:t>Allows smoother rate limiting by sliding the window dynamically.</a:t>
-            </a:r>
-          </a:p>
-          <a:p>
-            <a:pPr algn="l">
-              <a:buFont typeface="Arial" panose="020B0604020202020204" pitchFamily="34" charset="0"/>
-              <a:buChar char="•"/>
-            </a:pPr>
-            <a:r>
-              <a:rPr lang="en-GB" b="0" i="0" u="none" strike="noStrike" dirty="0">
-                <a:solidFill>
-                  <a:srgbClr val="000000"/>
-                </a:solidFill>
-                <a:effectLst/>
-              </a:rPr>
-              <a:t>Uses sorted sets with timestamps.</a:t>
-            </a:r>
-          </a:p>
-          <a:p>
-            <a:pPr marL="0" indent="0" algn="l">
-              <a:buNone/>
-            </a:pPr>
-            <a:endParaRPr lang="en-GB" dirty="0">
-              <a:solidFill>
-                <a:srgbClr val="000000"/>
-              </a:solidFill>
-            </a:endParaRPr>
-          </a:p>
-          <a:p>
-            <a:pPr marL="0" indent="0" algn="l">
-              <a:buNone/>
-            </a:pPr>
-            <a:r>
-              <a:rPr lang="en-GB" b="0" i="0" u="none" strike="noStrike" dirty="0">
-                <a:solidFill>
-                  <a:srgbClr val="000000"/>
-                </a:solidFill>
-                <a:effectLst/>
-              </a:rPr>
-              <a:t>Useful command in Jedis:</a:t>
-            </a:r>
-          </a:p>
-          <a:p>
-            <a:pPr marL="0" indent="0">
-              <a:buNone/>
-            </a:pPr>
-            <a:r>
-              <a:rPr lang="en-GB" b="0" i="0" u="none" strike="noStrike" dirty="0">
-                <a:solidFill>
-                  <a:srgbClr val="000000"/>
-                </a:solidFill>
-                <a:effectLst/>
-              </a:rPr>
-              <a:t> ZADD, ZREMRANGEBYSCORE, and ZCARD.</a:t>
-            </a:r>
-          </a:p>
-          <a:p>
-            <a:pPr marL="0" indent="0" algn="l">
-              <a:buNone/>
-            </a:pPr>
-            <a:endParaRPr lang="en-GB" b="0" i="0" u="none" strike="noStrike" dirty="0">
-              <a:solidFill>
-                <a:srgbClr val="000000"/>
-              </a:solidFill>
-              <a:effectLst/>
-            </a:endParaRPr>
-          </a:p>
-        </p:txBody>
-      </p:sp>
+      </p:pic>
     </p:spTree>
     <p:extLst>
       <p:ext uri="{BB962C8B-B14F-4D97-AF65-F5344CB8AC3E}">
-        <p14:creationId xmlns:p14="http://schemas.microsoft.com/office/powerpoint/2010/main" val="2885149603"/>
+        <p14:creationId xmlns:p14="http://schemas.microsoft.com/office/powerpoint/2010/main" val="2736861637"/>
       </p:ext>
     </p:extLst>
   </p:cSld>
@@ -7798,7 +8849,7 @@
 </p:sld>
 </file>
 
-<file path=ppt/slides/slide16.xml><?xml version="1.0" encoding="utf-8"?>
+<file path=ppt/slides/slide17.xml><?xml version="1.0" encoding="utf-8"?>
 <p:sld xmlns:a="http://schemas.openxmlformats.org/drawingml/2006/main" xmlns:r="http://schemas.openxmlformats.org/officeDocument/2006/relationships" xmlns:p="http://schemas.openxmlformats.org/presentationml/2006/main">
   <p:cSld>
     <p:bg>
@@ -8102,40 +9153,118 @@
           </a:prstGeom>
         </p:spPr>
       </p:pic>
-      <p:pic>
-        <p:nvPicPr>
-          <p:cNvPr id="6" name="Picture 5">
+      <p:sp>
+        <p:nvSpPr>
+          <p:cNvPr id="8" name="Content Placeholder 7">
             <a:extLst>
               <a:ext uri="{FF2B5EF4-FFF2-40B4-BE49-F238E27FC236}">
-                <a16:creationId xmlns:a16="http://schemas.microsoft.com/office/drawing/2014/main" id="{D2120238-2765-7729-6FF1-0E08418F15BF}"/>
+                <a16:creationId xmlns:a16="http://schemas.microsoft.com/office/drawing/2014/main" id="{B12E6721-8524-1777-F051-7754B9B96C07}"/>
               </a:ext>
             </a:extLst>
           </p:cNvPr>
-          <p:cNvPicPr>
-            <a:picLocks noChangeAspect="1"/>
-          </p:cNvPicPr>
-          <p:nvPr/>
-        </p:nvPicPr>
-        <p:blipFill>
-          <a:blip r:embed="rId4"/>
-          <a:stretch>
-            <a:fillRect/>
-          </a:stretch>
-        </p:blipFill>
+          <p:cNvSpPr>
+            <a:spLocks noGrp="1"/>
+          </p:cNvSpPr>
+          <p:nvPr>
+            <p:ph idx="1"/>
+          </p:nvPr>
+        </p:nvSpPr>
         <p:spPr>
           <a:xfrm>
-            <a:off x="2522357" y="2325812"/>
-            <a:ext cx="6934200" cy="2514600"/>
+            <a:off x="838200" y="2208943"/>
+            <a:ext cx="10515600" cy="3968019"/>
           </a:xfrm>
-          <a:prstGeom prst="rect">
-            <a:avLst/>
-          </a:prstGeom>
         </p:spPr>
-      </p:pic>
+        <p:txBody>
+          <a:bodyPr>
+            <a:normAutofit/>
+          </a:bodyPr>
+          <a:lstStyle/>
+          <a:p>
+            <a:pPr algn="l">
+              <a:buFont typeface="Arial" panose="020B0604020202020204" pitchFamily="34" charset="0"/>
+              <a:buChar char="•"/>
+            </a:pPr>
+            <a:r>
+              <a:rPr lang="en-GB" b="0" i="0" u="none" strike="noStrike" dirty="0">
+                <a:solidFill>
+                  <a:srgbClr val="000000"/>
+                </a:solidFill>
+                <a:effectLst/>
+              </a:rPr>
+              <a:t>Allows smoother rate limiting by sliding the window dynamically.</a:t>
+            </a:r>
+          </a:p>
+          <a:p>
+            <a:pPr algn="l">
+              <a:buFont typeface="Arial" panose="020B0604020202020204" pitchFamily="34" charset="0"/>
+              <a:buChar char="•"/>
+            </a:pPr>
+            <a:r>
+              <a:rPr lang="en-GB" b="0" i="0" u="none" strike="noStrike" dirty="0">
+                <a:solidFill>
+                  <a:srgbClr val="000000"/>
+                </a:solidFill>
+                <a:effectLst/>
+              </a:rPr>
+              <a:t>Uses sorted sets with timestamps.</a:t>
+            </a:r>
+          </a:p>
+          <a:p>
+            <a:pPr marL="0" indent="0" algn="l">
+              <a:buNone/>
+            </a:pPr>
+            <a:endParaRPr lang="en-GB" dirty="0">
+              <a:solidFill>
+                <a:srgbClr val="000000"/>
+              </a:solidFill>
+            </a:endParaRPr>
+          </a:p>
+          <a:p>
+            <a:pPr marL="0" indent="0" algn="l">
+              <a:buNone/>
+            </a:pPr>
+            <a:r>
+              <a:rPr lang="en-GB" b="0" i="0" u="none" strike="noStrike" dirty="0">
+                <a:solidFill>
+                  <a:srgbClr val="000000"/>
+                </a:solidFill>
+                <a:effectLst/>
+              </a:rPr>
+              <a:t>Useful command in Jedis:</a:t>
+            </a:r>
+          </a:p>
+          <a:p>
+            <a:pPr marL="0" indent="0">
+              <a:buNone/>
+            </a:pPr>
+            <a:r>
+              <a:rPr lang="en-GB" b="0" i="0" u="none" strike="noStrike" dirty="0">
+                <a:solidFill>
+                  <a:srgbClr val="000000"/>
+                </a:solidFill>
+                <a:effectLst/>
+              </a:rPr>
+              <a:t> ZADD, ZREMRANGEBYSCORE, and ZCARD.</a:t>
+            </a:r>
+          </a:p>
+          <a:p>
+            <a:pPr marL="0" indent="0" algn="l">
+              <a:buNone/>
+            </a:pPr>
+            <a:endParaRPr lang="en-GB" b="0" i="0" u="none" strike="noStrike" dirty="0">
+              <a:solidFill>
+                <a:srgbClr val="000000"/>
+              </a:solidFill>
+              <a:effectLst/>
+            </a:endParaRPr>
+          </a:p>
+        </p:txBody>
+      </p:sp>
     </p:spTree>
     <p:extLst>
       <p:ext uri="{BB962C8B-B14F-4D97-AF65-F5344CB8AC3E}">
-        <p14:creationId xmlns:p14="http://schemas.microsoft.com/office/powerpoint/2010/main" val="1671443421"/>
+        <p14:creationId xmlns:p14="http://schemas.microsoft.com/office/powerpoint/2010/main" val="2885149603"/>
       </p:ext>
     </p:extLst>
   </p:cSld>
@@ -8145,7 +9274,7 @@
 </p:sld>
 </file>
 
-<file path=ppt/slides/slide17.xml><?xml version="1.0" encoding="utf-8"?>
+<file path=ppt/slides/slide18.xml><?xml version="1.0" encoding="utf-8"?>
 <p:sld xmlns:a="http://schemas.openxmlformats.org/drawingml/2006/main" xmlns:r="http://schemas.openxmlformats.org/officeDocument/2006/relationships" xmlns:p="http://schemas.openxmlformats.org/presentationml/2006/main">
   <p:cSld>
     <p:bg>
@@ -8451,10 +9580,10 @@
       </p:pic>
       <p:pic>
         <p:nvPicPr>
-          <p:cNvPr id="7" name="Picture 6">
+          <p:cNvPr id="6" name="Picture 5">
             <a:extLst>
               <a:ext uri="{FF2B5EF4-FFF2-40B4-BE49-F238E27FC236}">
-                <a16:creationId xmlns:a16="http://schemas.microsoft.com/office/drawing/2014/main" id="{E783B79A-4E83-5D2F-4147-FF861AFAB120}"/>
+                <a16:creationId xmlns:a16="http://schemas.microsoft.com/office/drawing/2014/main" id="{D2120238-2765-7729-6FF1-0E08418F15BF}"/>
               </a:ext>
             </a:extLst>
           </p:cNvPr>
@@ -8471,8 +9600,8 @@
         </p:blipFill>
         <p:spPr>
           <a:xfrm>
-            <a:off x="2456043" y="2257331"/>
-            <a:ext cx="7213600" cy="2705100"/>
+            <a:off x="2522357" y="2325812"/>
+            <a:ext cx="6934200" cy="2514600"/>
           </a:xfrm>
           <a:prstGeom prst="rect">
             <a:avLst/>
@@ -8482,7 +9611,7 @@
     </p:spTree>
     <p:extLst>
       <p:ext uri="{BB962C8B-B14F-4D97-AF65-F5344CB8AC3E}">
-        <p14:creationId xmlns:p14="http://schemas.microsoft.com/office/powerpoint/2010/main" val="568995927"/>
+        <p14:creationId xmlns:p14="http://schemas.microsoft.com/office/powerpoint/2010/main" val="1671443421"/>
       </p:ext>
     </p:extLst>
   </p:cSld>
@@ -8492,7 +9621,7 @@
 </p:sld>
 </file>
 
-<file path=ppt/slides/slide18.xml><?xml version="1.0" encoding="utf-8"?>
+<file path=ppt/slides/slide19.xml><?xml version="1.0" encoding="utf-8"?>
 <p:sld xmlns:a="http://schemas.openxmlformats.org/drawingml/2006/main" xmlns:r="http://schemas.openxmlformats.org/officeDocument/2006/relationships" xmlns:p="http://schemas.openxmlformats.org/presentationml/2006/main">
   <p:cSld>
     <p:bg>
@@ -8798,10 +9927,10 @@
       </p:pic>
       <p:pic>
         <p:nvPicPr>
-          <p:cNvPr id="6" name="Picture 5">
+          <p:cNvPr id="7" name="Picture 6">
             <a:extLst>
               <a:ext uri="{FF2B5EF4-FFF2-40B4-BE49-F238E27FC236}">
-                <a16:creationId xmlns:a16="http://schemas.microsoft.com/office/drawing/2014/main" id="{12EA8D52-3668-7A6D-F6B0-431025066F95}"/>
+                <a16:creationId xmlns:a16="http://schemas.microsoft.com/office/drawing/2014/main" id="{E783B79A-4E83-5D2F-4147-FF861AFAB120}"/>
               </a:ext>
             </a:extLst>
           </p:cNvPr>
@@ -8818,8 +9947,8 @@
         </p:blipFill>
         <p:spPr>
           <a:xfrm>
-            <a:off x="2392425" y="2117631"/>
-            <a:ext cx="7404100" cy="2984500"/>
+            <a:off x="2456043" y="2257331"/>
+            <a:ext cx="7213600" cy="2705100"/>
           </a:xfrm>
           <a:prstGeom prst="rect">
             <a:avLst/>
@@ -8829,354 +9958,7 @@
     </p:spTree>
     <p:extLst>
       <p:ext uri="{BB962C8B-B14F-4D97-AF65-F5344CB8AC3E}">
-        <p14:creationId xmlns:p14="http://schemas.microsoft.com/office/powerpoint/2010/main" val="2869624421"/>
-      </p:ext>
-    </p:extLst>
-  </p:cSld>
-  <p:clrMapOvr>
-    <a:masterClrMapping/>
-  </p:clrMapOvr>
-</p:sld>
-</file>
-
-<file path=ppt/slides/slide19.xml><?xml version="1.0" encoding="utf-8"?>
-<p:sld xmlns:a="http://schemas.openxmlformats.org/drawingml/2006/main" xmlns:r="http://schemas.openxmlformats.org/officeDocument/2006/relationships" xmlns:p="http://schemas.openxmlformats.org/presentationml/2006/main">
-  <p:cSld>
-    <p:bg>
-      <p:bgPr>
-        <a:solidFill>
-          <a:schemeClr val="bg1"/>
-        </a:solidFill>
-        <a:effectLst/>
-      </p:bgPr>
-    </p:bg>
-    <p:spTree>
-      <p:nvGrpSpPr>
-        <p:cNvPr id="1" name="">
-          <a:extLst>
-            <a:ext uri="{FF2B5EF4-FFF2-40B4-BE49-F238E27FC236}">
-              <a16:creationId xmlns:a16="http://schemas.microsoft.com/office/drawing/2014/main" id="{2D02EA1F-31C9-B8A1-1B2A-D0B7AA1AC501}"/>
-            </a:ext>
-          </a:extLst>
-        </p:cNvPr>
-        <p:cNvGrpSpPr/>
-        <p:nvPr/>
-      </p:nvGrpSpPr>
-      <p:grpSpPr>
-        <a:xfrm>
-          <a:off x="0" y="0"/>
-          <a:ext cx="0" cy="0"/>
-          <a:chOff x="0" y="0"/>
-          <a:chExt cx="0" cy="0"/>
-        </a:xfrm>
-      </p:grpSpPr>
-      <p:sp useBgFill="1">
-        <p:nvSpPr>
-          <p:cNvPr id="14" name="Rectangle 13">
-            <a:extLst>
-              <a:ext uri="{FF2B5EF4-FFF2-40B4-BE49-F238E27FC236}">
-                <a16:creationId xmlns:a16="http://schemas.microsoft.com/office/drawing/2014/main" id="{82BD2171-EB0C-6637-9808-10691A312172}"/>
-              </a:ext>
-              <a:ext uri="{C183D7F6-B498-43B3-948B-1728B52AA6E4}">
-                <adec:decorative xmlns:adec="http://schemas.microsoft.com/office/drawing/2017/decorative" val="1"/>
-              </a:ext>
-            </a:extLst>
-          </p:cNvPr>
-          <p:cNvSpPr>
-            <a:spLocks noGrp="1" noRot="1" noChangeAspect="1" noMove="1" noResize="1" noEditPoints="1" noAdjustHandles="1" noChangeArrowheads="1" noChangeShapeType="1" noTextEdit="1"/>
-          </p:cNvSpPr>
-          <p:nvPr>
-            <p:extLst>
-              <p:ext uri="{386F3935-93C4-4BCD-93E2-E3B085C9AB24}">
-                <p16:designElem xmlns:p16="http://schemas.microsoft.com/office/powerpoint/2015/main" val="1"/>
-              </p:ext>
-            </p:extLst>
-          </p:nvPr>
-        </p:nvSpPr>
-        <p:spPr>
-          <a:xfrm>
-            <a:off x="-1" y="0"/>
-            <a:ext cx="12188952" cy="6858000"/>
-          </a:xfrm>
-          <a:prstGeom prst="rect">
-            <a:avLst/>
-          </a:prstGeom>
-          <a:ln>
-            <a:noFill/>
-          </a:ln>
-        </p:spPr>
-        <p:style>
-          <a:lnRef idx="2">
-            <a:schemeClr val="accent1">
-              <a:shade val="50000"/>
-            </a:schemeClr>
-          </a:lnRef>
-          <a:fillRef idx="1">
-            <a:schemeClr val="accent1"/>
-          </a:fillRef>
-          <a:effectRef idx="0">
-            <a:schemeClr val="accent1"/>
-          </a:effectRef>
-          <a:fontRef idx="minor">
-            <a:schemeClr val="lt1"/>
-          </a:fontRef>
-        </p:style>
-        <p:txBody>
-          <a:bodyPr rtlCol="0" anchor="ctr"/>
-          <a:lstStyle/>
-          <a:p>
-            <a:pPr algn="ctr"/>
-            <a:endParaRPr lang="en-US"/>
-          </a:p>
-        </p:txBody>
-      </p:sp>
-      <p:pic>
-        <p:nvPicPr>
-          <p:cNvPr id="5" name="Content Placeholder 4" descr="A blue and white sky&#10;&#10;Description automatically generated">
-            <a:extLst>
-              <a:ext uri="{FF2B5EF4-FFF2-40B4-BE49-F238E27FC236}">
-                <a16:creationId xmlns:a16="http://schemas.microsoft.com/office/drawing/2014/main" id="{F2768597-BB33-9BFF-EA7E-E4C9F8A0D5D0}"/>
-              </a:ext>
-            </a:extLst>
-          </p:cNvPr>
-          <p:cNvPicPr>
-            <a:picLocks noGrp="1" noRot="1" noChangeAspect="1" noMove="1" noResize="1" noEditPoints="1" noAdjustHandles="1" noChangeArrowheads="1" noChangeShapeType="1" noCrop="1"/>
-          </p:cNvPicPr>
-          <p:nvPr/>
-        </p:nvPicPr>
-        <p:blipFill>
-          <a:blip r:embed="rId2"/>
-          <a:srcRect r="6237"/>
-          <a:stretch/>
-        </p:blipFill>
-        <p:spPr>
-          <a:xfrm>
-            <a:off x="1" y="10"/>
-            <a:ext cx="9669642" cy="6857990"/>
-          </a:xfrm>
-          <a:prstGeom prst="rect">
-            <a:avLst/>
-          </a:prstGeom>
-        </p:spPr>
-      </p:pic>
-      <p:sp>
-        <p:nvSpPr>
-          <p:cNvPr id="16" name="Rectangle 15">
-            <a:extLst>
-              <a:ext uri="{FF2B5EF4-FFF2-40B4-BE49-F238E27FC236}">
-                <a16:creationId xmlns:a16="http://schemas.microsoft.com/office/drawing/2014/main" id="{D7DEAD93-B269-F264-F9C1-77C79BC11A61}"/>
-              </a:ext>
-              <a:ext uri="{C183D7F6-B498-43B3-948B-1728B52AA6E4}">
-                <adec:decorative xmlns:adec="http://schemas.microsoft.com/office/drawing/2017/decorative" val="1"/>
-              </a:ext>
-            </a:extLst>
-          </p:cNvPr>
-          <p:cNvSpPr>
-            <a:spLocks noGrp="1" noRot="1" noChangeAspect="1" noMove="1" noResize="1" noEditPoints="1" noAdjustHandles="1" noChangeArrowheads="1" noChangeShapeType="1" noTextEdit="1"/>
-          </p:cNvSpPr>
-          <p:nvPr>
-            <p:extLst>
-              <p:ext uri="{386F3935-93C4-4BCD-93E2-E3B085C9AB24}">
-                <p16:designElem xmlns:p16="http://schemas.microsoft.com/office/powerpoint/2015/main" val="1"/>
-              </p:ext>
-            </p:extLst>
-          </p:nvPr>
-        </p:nvSpPr>
-        <p:spPr>
-          <a:xfrm flipH="1">
-            <a:off x="5125019" y="0"/>
-            <a:ext cx="7066978" cy="6858000"/>
-          </a:xfrm>
-          <a:prstGeom prst="rect">
-            <a:avLst/>
-          </a:prstGeom>
-          <a:gradFill>
-            <a:gsLst>
-              <a:gs pos="48000">
-                <a:schemeClr val="bg1"/>
-              </a:gs>
-              <a:gs pos="35000">
-                <a:schemeClr val="bg1">
-                  <a:alpha val="77000"/>
-                </a:schemeClr>
-              </a:gs>
-              <a:gs pos="19000">
-                <a:schemeClr val="bg1">
-                  <a:alpha val="38000"/>
-                </a:schemeClr>
-              </a:gs>
-              <a:gs pos="0">
-                <a:schemeClr val="bg1">
-                  <a:alpha val="0"/>
-                </a:schemeClr>
-              </a:gs>
-              <a:gs pos="100000">
-                <a:schemeClr val="bg1"/>
-              </a:gs>
-            </a:gsLst>
-            <a:lin ang="10800000" scaled="0"/>
-          </a:gradFill>
-          <a:ln>
-            <a:noFill/>
-          </a:ln>
-        </p:spPr>
-        <p:style>
-          <a:lnRef idx="2">
-            <a:schemeClr val="accent1">
-              <a:shade val="50000"/>
-            </a:schemeClr>
-          </a:lnRef>
-          <a:fillRef idx="1">
-            <a:schemeClr val="accent1"/>
-          </a:fillRef>
-          <a:effectRef idx="0">
-            <a:schemeClr val="accent1"/>
-          </a:effectRef>
-          <a:fontRef idx="minor">
-            <a:schemeClr val="lt1"/>
-          </a:fontRef>
-        </p:style>
-        <p:txBody>
-          <a:bodyPr rtlCol="0" anchor="ctr"/>
-          <a:lstStyle/>
-          <a:p>
-            <a:pPr algn="ctr"/>
-            <a:endParaRPr lang="en-US" dirty="0"/>
-          </a:p>
-        </p:txBody>
-      </p:sp>
-      <p:sp>
-        <p:nvSpPr>
-          <p:cNvPr id="2" name="Title 1">
-            <a:extLst>
-              <a:ext uri="{FF2B5EF4-FFF2-40B4-BE49-F238E27FC236}">
-                <a16:creationId xmlns:a16="http://schemas.microsoft.com/office/drawing/2014/main" id="{91F8BAFD-9138-31EA-4AD5-1C12B5D323F9}"/>
-              </a:ext>
-            </a:extLst>
-          </p:cNvPr>
-          <p:cNvSpPr>
-            <a:spLocks noGrp="1"/>
-          </p:cNvSpPr>
-          <p:nvPr>
-            <p:ph type="title"/>
-          </p:nvPr>
-        </p:nvSpPr>
-        <p:spPr>
-          <a:xfrm>
-            <a:off x="775494" y="224816"/>
-            <a:ext cx="9132570" cy="912441"/>
-          </a:xfrm>
-        </p:spPr>
-        <p:txBody>
-          <a:bodyPr>
-            <a:normAutofit fontScale="90000"/>
-          </a:bodyPr>
-          <a:lstStyle/>
-          <a:p>
-            <a:r>
-              <a:rPr lang="en-US" sz="6000" b="1" dirty="0">
-                <a:gradFill flip="none" rotWithShape="1">
-                  <a:gsLst>
-                    <a:gs pos="7000">
-                      <a:schemeClr val="tx2">
-                        <a:lumMod val="50000"/>
-                        <a:lumOff val="50000"/>
-                      </a:schemeClr>
-                    </a:gs>
-                    <a:gs pos="35000">
-                      <a:schemeClr val="accent5">
-                        <a:lumMod val="60000"/>
-                        <a:lumOff val="40000"/>
-                      </a:schemeClr>
-                    </a:gs>
-                    <a:gs pos="76000">
-                      <a:srgbClr val="0070C0"/>
-                    </a:gs>
-                    <a:gs pos="97000">
-                      <a:schemeClr val="tx2">
-                        <a:lumMod val="75000"/>
-                        <a:lumOff val="25000"/>
-                      </a:schemeClr>
-                    </a:gs>
-                  </a:gsLst>
-                  <a:path path="rect">
-                    <a:fillToRect l="100000" t="100000"/>
-                  </a:path>
-                  <a:tileRect r="-100000" b="-100000"/>
-                </a:gradFill>
-                <a:latin typeface="Calibri" panose="020F0502020204030204" pitchFamily="34" charset="0"/>
-                <a:cs typeface="Calibri" panose="020F0502020204030204" pitchFamily="34" charset="0"/>
-              </a:rPr>
-              <a:t>Sliding Window Algorithm</a:t>
-            </a:r>
-            <a:endParaRPr lang="en-US" sz="4000" dirty="0"/>
-          </a:p>
-        </p:txBody>
-      </p:sp>
-      <p:pic>
-        <p:nvPicPr>
-          <p:cNvPr id="3" name="Picture 2" descr="A green dot in a black background&#10;&#10;Description automatically generated">
-            <a:extLst>
-              <a:ext uri="{FF2B5EF4-FFF2-40B4-BE49-F238E27FC236}">
-                <a16:creationId xmlns:a16="http://schemas.microsoft.com/office/drawing/2014/main" id="{C869E6FB-D320-9C9E-4719-7D24A42E63D0}"/>
-              </a:ext>
-            </a:extLst>
-          </p:cNvPr>
-          <p:cNvPicPr>
-            <a:picLocks noChangeAspect="1"/>
-          </p:cNvPicPr>
-          <p:nvPr/>
-        </p:nvPicPr>
-        <p:blipFill>
-          <a:blip r:embed="rId3"/>
-          <a:stretch>
-            <a:fillRect/>
-          </a:stretch>
-        </p:blipFill>
-        <p:spPr>
-          <a:xfrm>
-            <a:off x="0" y="6082506"/>
-            <a:ext cx="775494" cy="775494"/>
-          </a:xfrm>
-          <a:prstGeom prst="rect">
-            <a:avLst/>
-          </a:prstGeom>
-        </p:spPr>
-      </p:pic>
-      <p:pic>
-        <p:nvPicPr>
-          <p:cNvPr id="7" name="Picture 6">
-            <a:extLst>
-              <a:ext uri="{FF2B5EF4-FFF2-40B4-BE49-F238E27FC236}">
-                <a16:creationId xmlns:a16="http://schemas.microsoft.com/office/drawing/2014/main" id="{D5AE8803-E093-5939-A0F9-4DEC6DB8F3C6}"/>
-              </a:ext>
-            </a:extLst>
-          </p:cNvPr>
-          <p:cNvPicPr>
-            <a:picLocks noChangeAspect="1"/>
-          </p:cNvPicPr>
-          <p:nvPr/>
-        </p:nvPicPr>
-        <p:blipFill>
-          <a:blip r:embed="rId4"/>
-          <a:stretch>
-            <a:fillRect/>
-          </a:stretch>
-        </p:blipFill>
-        <p:spPr>
-          <a:xfrm>
-            <a:off x="2252725" y="2244631"/>
-            <a:ext cx="7683500" cy="2730500"/>
-          </a:xfrm>
-          <a:prstGeom prst="rect">
-            <a:avLst/>
-          </a:prstGeom>
-        </p:spPr>
-      </p:pic>
-    </p:spTree>
-    <p:extLst>
-      <p:ext uri="{BB962C8B-B14F-4D97-AF65-F5344CB8AC3E}">
-        <p14:creationId xmlns:p14="http://schemas.microsoft.com/office/powerpoint/2010/main" val="3276134561"/>
+        <p14:creationId xmlns:p14="http://schemas.microsoft.com/office/powerpoint/2010/main" val="568995927"/>
       </p:ext>
     </p:extLst>
   </p:cSld>
@@ -9895,6 +10677,700 @@
           <p:cNvPr id="6" name="Picture 5">
             <a:extLst>
               <a:ext uri="{FF2B5EF4-FFF2-40B4-BE49-F238E27FC236}">
+                <a16:creationId xmlns:a16="http://schemas.microsoft.com/office/drawing/2014/main" id="{12EA8D52-3668-7A6D-F6B0-431025066F95}"/>
+              </a:ext>
+            </a:extLst>
+          </p:cNvPr>
+          <p:cNvPicPr>
+            <a:picLocks noChangeAspect="1"/>
+          </p:cNvPicPr>
+          <p:nvPr/>
+        </p:nvPicPr>
+        <p:blipFill>
+          <a:blip r:embed="rId4"/>
+          <a:stretch>
+            <a:fillRect/>
+          </a:stretch>
+        </p:blipFill>
+        <p:spPr>
+          <a:xfrm>
+            <a:off x="2392425" y="2117631"/>
+            <a:ext cx="7404100" cy="2984500"/>
+          </a:xfrm>
+          <a:prstGeom prst="rect">
+            <a:avLst/>
+          </a:prstGeom>
+        </p:spPr>
+      </p:pic>
+    </p:spTree>
+    <p:extLst>
+      <p:ext uri="{BB962C8B-B14F-4D97-AF65-F5344CB8AC3E}">
+        <p14:creationId xmlns:p14="http://schemas.microsoft.com/office/powerpoint/2010/main" val="2869624421"/>
+      </p:ext>
+    </p:extLst>
+  </p:cSld>
+  <p:clrMapOvr>
+    <a:masterClrMapping/>
+  </p:clrMapOvr>
+</p:sld>
+</file>
+
+<file path=ppt/slides/slide21.xml><?xml version="1.0" encoding="utf-8"?>
+<p:sld xmlns:a="http://schemas.openxmlformats.org/drawingml/2006/main" xmlns:r="http://schemas.openxmlformats.org/officeDocument/2006/relationships" xmlns:p="http://schemas.openxmlformats.org/presentationml/2006/main">
+  <p:cSld>
+    <p:bg>
+      <p:bgPr>
+        <a:solidFill>
+          <a:schemeClr val="bg1"/>
+        </a:solidFill>
+        <a:effectLst/>
+      </p:bgPr>
+    </p:bg>
+    <p:spTree>
+      <p:nvGrpSpPr>
+        <p:cNvPr id="1" name="">
+          <a:extLst>
+            <a:ext uri="{FF2B5EF4-FFF2-40B4-BE49-F238E27FC236}">
+              <a16:creationId xmlns:a16="http://schemas.microsoft.com/office/drawing/2014/main" id="{2D02EA1F-31C9-B8A1-1B2A-D0B7AA1AC501}"/>
+            </a:ext>
+          </a:extLst>
+        </p:cNvPr>
+        <p:cNvGrpSpPr/>
+        <p:nvPr/>
+      </p:nvGrpSpPr>
+      <p:grpSpPr>
+        <a:xfrm>
+          <a:off x="0" y="0"/>
+          <a:ext cx="0" cy="0"/>
+          <a:chOff x="0" y="0"/>
+          <a:chExt cx="0" cy="0"/>
+        </a:xfrm>
+      </p:grpSpPr>
+      <p:sp useBgFill="1">
+        <p:nvSpPr>
+          <p:cNvPr id="14" name="Rectangle 13">
+            <a:extLst>
+              <a:ext uri="{FF2B5EF4-FFF2-40B4-BE49-F238E27FC236}">
+                <a16:creationId xmlns:a16="http://schemas.microsoft.com/office/drawing/2014/main" id="{82BD2171-EB0C-6637-9808-10691A312172}"/>
+              </a:ext>
+              <a:ext uri="{C183D7F6-B498-43B3-948B-1728B52AA6E4}">
+                <adec:decorative xmlns:adec="http://schemas.microsoft.com/office/drawing/2017/decorative" val="1"/>
+              </a:ext>
+            </a:extLst>
+          </p:cNvPr>
+          <p:cNvSpPr>
+            <a:spLocks noGrp="1" noRot="1" noChangeAspect="1" noMove="1" noResize="1" noEditPoints="1" noAdjustHandles="1" noChangeArrowheads="1" noChangeShapeType="1" noTextEdit="1"/>
+          </p:cNvSpPr>
+          <p:nvPr>
+            <p:extLst>
+              <p:ext uri="{386F3935-93C4-4BCD-93E2-E3B085C9AB24}">
+                <p16:designElem xmlns:p16="http://schemas.microsoft.com/office/powerpoint/2015/main" val="1"/>
+              </p:ext>
+            </p:extLst>
+          </p:nvPr>
+        </p:nvSpPr>
+        <p:spPr>
+          <a:xfrm>
+            <a:off x="-1" y="0"/>
+            <a:ext cx="12188952" cy="6858000"/>
+          </a:xfrm>
+          <a:prstGeom prst="rect">
+            <a:avLst/>
+          </a:prstGeom>
+          <a:ln>
+            <a:noFill/>
+          </a:ln>
+        </p:spPr>
+        <p:style>
+          <a:lnRef idx="2">
+            <a:schemeClr val="accent1">
+              <a:shade val="50000"/>
+            </a:schemeClr>
+          </a:lnRef>
+          <a:fillRef idx="1">
+            <a:schemeClr val="accent1"/>
+          </a:fillRef>
+          <a:effectRef idx="0">
+            <a:schemeClr val="accent1"/>
+          </a:effectRef>
+          <a:fontRef idx="minor">
+            <a:schemeClr val="lt1"/>
+          </a:fontRef>
+        </p:style>
+        <p:txBody>
+          <a:bodyPr rtlCol="0" anchor="ctr"/>
+          <a:lstStyle/>
+          <a:p>
+            <a:pPr algn="ctr"/>
+            <a:endParaRPr lang="en-US"/>
+          </a:p>
+        </p:txBody>
+      </p:sp>
+      <p:pic>
+        <p:nvPicPr>
+          <p:cNvPr id="5" name="Content Placeholder 4" descr="A blue and white sky&#10;&#10;Description automatically generated">
+            <a:extLst>
+              <a:ext uri="{FF2B5EF4-FFF2-40B4-BE49-F238E27FC236}">
+                <a16:creationId xmlns:a16="http://schemas.microsoft.com/office/drawing/2014/main" id="{F2768597-BB33-9BFF-EA7E-E4C9F8A0D5D0}"/>
+              </a:ext>
+            </a:extLst>
+          </p:cNvPr>
+          <p:cNvPicPr>
+            <a:picLocks noGrp="1" noRot="1" noChangeAspect="1" noMove="1" noResize="1" noEditPoints="1" noAdjustHandles="1" noChangeArrowheads="1" noChangeShapeType="1" noCrop="1"/>
+          </p:cNvPicPr>
+          <p:nvPr/>
+        </p:nvPicPr>
+        <p:blipFill>
+          <a:blip r:embed="rId2"/>
+          <a:srcRect r="6237"/>
+          <a:stretch/>
+        </p:blipFill>
+        <p:spPr>
+          <a:xfrm>
+            <a:off x="1" y="10"/>
+            <a:ext cx="9669642" cy="6857990"/>
+          </a:xfrm>
+          <a:prstGeom prst="rect">
+            <a:avLst/>
+          </a:prstGeom>
+        </p:spPr>
+      </p:pic>
+      <p:sp>
+        <p:nvSpPr>
+          <p:cNvPr id="16" name="Rectangle 15">
+            <a:extLst>
+              <a:ext uri="{FF2B5EF4-FFF2-40B4-BE49-F238E27FC236}">
+                <a16:creationId xmlns:a16="http://schemas.microsoft.com/office/drawing/2014/main" id="{D7DEAD93-B269-F264-F9C1-77C79BC11A61}"/>
+              </a:ext>
+              <a:ext uri="{C183D7F6-B498-43B3-948B-1728B52AA6E4}">
+                <adec:decorative xmlns:adec="http://schemas.microsoft.com/office/drawing/2017/decorative" val="1"/>
+              </a:ext>
+            </a:extLst>
+          </p:cNvPr>
+          <p:cNvSpPr>
+            <a:spLocks noGrp="1" noRot="1" noChangeAspect="1" noMove="1" noResize="1" noEditPoints="1" noAdjustHandles="1" noChangeArrowheads="1" noChangeShapeType="1" noTextEdit="1"/>
+          </p:cNvSpPr>
+          <p:nvPr>
+            <p:extLst>
+              <p:ext uri="{386F3935-93C4-4BCD-93E2-E3B085C9AB24}">
+                <p16:designElem xmlns:p16="http://schemas.microsoft.com/office/powerpoint/2015/main" val="1"/>
+              </p:ext>
+            </p:extLst>
+          </p:nvPr>
+        </p:nvSpPr>
+        <p:spPr>
+          <a:xfrm flipH="1">
+            <a:off x="5125019" y="0"/>
+            <a:ext cx="7066978" cy="6858000"/>
+          </a:xfrm>
+          <a:prstGeom prst="rect">
+            <a:avLst/>
+          </a:prstGeom>
+          <a:gradFill>
+            <a:gsLst>
+              <a:gs pos="48000">
+                <a:schemeClr val="bg1"/>
+              </a:gs>
+              <a:gs pos="35000">
+                <a:schemeClr val="bg1">
+                  <a:alpha val="77000"/>
+                </a:schemeClr>
+              </a:gs>
+              <a:gs pos="19000">
+                <a:schemeClr val="bg1">
+                  <a:alpha val="38000"/>
+                </a:schemeClr>
+              </a:gs>
+              <a:gs pos="0">
+                <a:schemeClr val="bg1">
+                  <a:alpha val="0"/>
+                </a:schemeClr>
+              </a:gs>
+              <a:gs pos="100000">
+                <a:schemeClr val="bg1"/>
+              </a:gs>
+            </a:gsLst>
+            <a:lin ang="10800000" scaled="0"/>
+          </a:gradFill>
+          <a:ln>
+            <a:noFill/>
+          </a:ln>
+        </p:spPr>
+        <p:style>
+          <a:lnRef idx="2">
+            <a:schemeClr val="accent1">
+              <a:shade val="50000"/>
+            </a:schemeClr>
+          </a:lnRef>
+          <a:fillRef idx="1">
+            <a:schemeClr val="accent1"/>
+          </a:fillRef>
+          <a:effectRef idx="0">
+            <a:schemeClr val="accent1"/>
+          </a:effectRef>
+          <a:fontRef idx="minor">
+            <a:schemeClr val="lt1"/>
+          </a:fontRef>
+        </p:style>
+        <p:txBody>
+          <a:bodyPr rtlCol="0" anchor="ctr"/>
+          <a:lstStyle/>
+          <a:p>
+            <a:pPr algn="ctr"/>
+            <a:endParaRPr lang="en-US" dirty="0"/>
+          </a:p>
+        </p:txBody>
+      </p:sp>
+      <p:sp>
+        <p:nvSpPr>
+          <p:cNvPr id="2" name="Title 1">
+            <a:extLst>
+              <a:ext uri="{FF2B5EF4-FFF2-40B4-BE49-F238E27FC236}">
+                <a16:creationId xmlns:a16="http://schemas.microsoft.com/office/drawing/2014/main" id="{91F8BAFD-9138-31EA-4AD5-1C12B5D323F9}"/>
+              </a:ext>
+            </a:extLst>
+          </p:cNvPr>
+          <p:cNvSpPr>
+            <a:spLocks noGrp="1"/>
+          </p:cNvSpPr>
+          <p:nvPr>
+            <p:ph type="title"/>
+          </p:nvPr>
+        </p:nvSpPr>
+        <p:spPr>
+          <a:xfrm>
+            <a:off x="775494" y="224816"/>
+            <a:ext cx="9132570" cy="912441"/>
+          </a:xfrm>
+        </p:spPr>
+        <p:txBody>
+          <a:bodyPr>
+            <a:normAutofit fontScale="90000"/>
+          </a:bodyPr>
+          <a:lstStyle/>
+          <a:p>
+            <a:r>
+              <a:rPr lang="en-US" sz="6000" b="1" dirty="0">
+                <a:gradFill flip="none" rotWithShape="1">
+                  <a:gsLst>
+                    <a:gs pos="7000">
+                      <a:schemeClr val="tx2">
+                        <a:lumMod val="50000"/>
+                        <a:lumOff val="50000"/>
+                      </a:schemeClr>
+                    </a:gs>
+                    <a:gs pos="35000">
+                      <a:schemeClr val="accent5">
+                        <a:lumMod val="60000"/>
+                        <a:lumOff val="40000"/>
+                      </a:schemeClr>
+                    </a:gs>
+                    <a:gs pos="76000">
+                      <a:srgbClr val="0070C0"/>
+                    </a:gs>
+                    <a:gs pos="97000">
+                      <a:schemeClr val="tx2">
+                        <a:lumMod val="75000"/>
+                        <a:lumOff val="25000"/>
+                      </a:schemeClr>
+                    </a:gs>
+                  </a:gsLst>
+                  <a:path path="rect">
+                    <a:fillToRect l="100000" t="100000"/>
+                  </a:path>
+                  <a:tileRect r="-100000" b="-100000"/>
+                </a:gradFill>
+                <a:latin typeface="Calibri" panose="020F0502020204030204" pitchFamily="34" charset="0"/>
+                <a:cs typeface="Calibri" panose="020F0502020204030204" pitchFamily="34" charset="0"/>
+              </a:rPr>
+              <a:t>Sliding Window Algorithm</a:t>
+            </a:r>
+            <a:endParaRPr lang="en-US" sz="4000" dirty="0"/>
+          </a:p>
+        </p:txBody>
+      </p:sp>
+      <p:pic>
+        <p:nvPicPr>
+          <p:cNvPr id="3" name="Picture 2" descr="A green dot in a black background&#10;&#10;Description automatically generated">
+            <a:extLst>
+              <a:ext uri="{FF2B5EF4-FFF2-40B4-BE49-F238E27FC236}">
+                <a16:creationId xmlns:a16="http://schemas.microsoft.com/office/drawing/2014/main" id="{C869E6FB-D320-9C9E-4719-7D24A42E63D0}"/>
+              </a:ext>
+            </a:extLst>
+          </p:cNvPr>
+          <p:cNvPicPr>
+            <a:picLocks noChangeAspect="1"/>
+          </p:cNvPicPr>
+          <p:nvPr/>
+        </p:nvPicPr>
+        <p:blipFill>
+          <a:blip r:embed="rId3"/>
+          <a:stretch>
+            <a:fillRect/>
+          </a:stretch>
+        </p:blipFill>
+        <p:spPr>
+          <a:xfrm>
+            <a:off x="0" y="6082506"/>
+            <a:ext cx="775494" cy="775494"/>
+          </a:xfrm>
+          <a:prstGeom prst="rect">
+            <a:avLst/>
+          </a:prstGeom>
+        </p:spPr>
+      </p:pic>
+      <p:pic>
+        <p:nvPicPr>
+          <p:cNvPr id="7" name="Picture 6">
+            <a:extLst>
+              <a:ext uri="{FF2B5EF4-FFF2-40B4-BE49-F238E27FC236}">
+                <a16:creationId xmlns:a16="http://schemas.microsoft.com/office/drawing/2014/main" id="{D5AE8803-E093-5939-A0F9-4DEC6DB8F3C6}"/>
+              </a:ext>
+            </a:extLst>
+          </p:cNvPr>
+          <p:cNvPicPr>
+            <a:picLocks noChangeAspect="1"/>
+          </p:cNvPicPr>
+          <p:nvPr/>
+        </p:nvPicPr>
+        <p:blipFill>
+          <a:blip r:embed="rId4"/>
+          <a:stretch>
+            <a:fillRect/>
+          </a:stretch>
+        </p:blipFill>
+        <p:spPr>
+          <a:xfrm>
+            <a:off x="2252725" y="2244631"/>
+            <a:ext cx="7683500" cy="2730500"/>
+          </a:xfrm>
+          <a:prstGeom prst="rect">
+            <a:avLst/>
+          </a:prstGeom>
+        </p:spPr>
+      </p:pic>
+    </p:spTree>
+    <p:extLst>
+      <p:ext uri="{BB962C8B-B14F-4D97-AF65-F5344CB8AC3E}">
+        <p14:creationId xmlns:p14="http://schemas.microsoft.com/office/powerpoint/2010/main" val="3276134561"/>
+      </p:ext>
+    </p:extLst>
+  </p:cSld>
+  <p:clrMapOvr>
+    <a:masterClrMapping/>
+  </p:clrMapOvr>
+</p:sld>
+</file>
+
+<file path=ppt/slides/slide22.xml><?xml version="1.0" encoding="utf-8"?>
+<p:sld xmlns:a="http://schemas.openxmlformats.org/drawingml/2006/main" xmlns:r="http://schemas.openxmlformats.org/officeDocument/2006/relationships" xmlns:p="http://schemas.openxmlformats.org/presentationml/2006/main">
+  <p:cSld>
+    <p:bg>
+      <p:bgPr>
+        <a:solidFill>
+          <a:schemeClr val="bg1"/>
+        </a:solidFill>
+        <a:effectLst/>
+      </p:bgPr>
+    </p:bg>
+    <p:spTree>
+      <p:nvGrpSpPr>
+        <p:cNvPr id="1" name="">
+          <a:extLst>
+            <a:ext uri="{FF2B5EF4-FFF2-40B4-BE49-F238E27FC236}">
+              <a16:creationId xmlns:a16="http://schemas.microsoft.com/office/drawing/2014/main" id="{2D02EA1F-31C9-B8A1-1B2A-D0B7AA1AC501}"/>
+            </a:ext>
+          </a:extLst>
+        </p:cNvPr>
+        <p:cNvGrpSpPr/>
+        <p:nvPr/>
+      </p:nvGrpSpPr>
+      <p:grpSpPr>
+        <a:xfrm>
+          <a:off x="0" y="0"/>
+          <a:ext cx="0" cy="0"/>
+          <a:chOff x="0" y="0"/>
+          <a:chExt cx="0" cy="0"/>
+        </a:xfrm>
+      </p:grpSpPr>
+      <p:sp useBgFill="1">
+        <p:nvSpPr>
+          <p:cNvPr id="14" name="Rectangle 13">
+            <a:extLst>
+              <a:ext uri="{FF2B5EF4-FFF2-40B4-BE49-F238E27FC236}">
+                <a16:creationId xmlns:a16="http://schemas.microsoft.com/office/drawing/2014/main" id="{82BD2171-EB0C-6637-9808-10691A312172}"/>
+              </a:ext>
+              <a:ext uri="{C183D7F6-B498-43B3-948B-1728B52AA6E4}">
+                <adec:decorative xmlns:adec="http://schemas.microsoft.com/office/drawing/2017/decorative" val="1"/>
+              </a:ext>
+            </a:extLst>
+          </p:cNvPr>
+          <p:cNvSpPr>
+            <a:spLocks noGrp="1" noRot="1" noChangeAspect="1" noMove="1" noResize="1" noEditPoints="1" noAdjustHandles="1" noChangeArrowheads="1" noChangeShapeType="1" noTextEdit="1"/>
+          </p:cNvSpPr>
+          <p:nvPr>
+            <p:extLst>
+              <p:ext uri="{386F3935-93C4-4BCD-93E2-E3B085C9AB24}">
+                <p16:designElem xmlns:p16="http://schemas.microsoft.com/office/powerpoint/2015/main" val="1"/>
+              </p:ext>
+            </p:extLst>
+          </p:nvPr>
+        </p:nvSpPr>
+        <p:spPr>
+          <a:xfrm>
+            <a:off x="-1" y="0"/>
+            <a:ext cx="12188952" cy="6858000"/>
+          </a:xfrm>
+          <a:prstGeom prst="rect">
+            <a:avLst/>
+          </a:prstGeom>
+          <a:ln>
+            <a:noFill/>
+          </a:ln>
+        </p:spPr>
+        <p:style>
+          <a:lnRef idx="2">
+            <a:schemeClr val="accent1">
+              <a:shade val="50000"/>
+            </a:schemeClr>
+          </a:lnRef>
+          <a:fillRef idx="1">
+            <a:schemeClr val="accent1"/>
+          </a:fillRef>
+          <a:effectRef idx="0">
+            <a:schemeClr val="accent1"/>
+          </a:effectRef>
+          <a:fontRef idx="minor">
+            <a:schemeClr val="lt1"/>
+          </a:fontRef>
+        </p:style>
+        <p:txBody>
+          <a:bodyPr rtlCol="0" anchor="ctr"/>
+          <a:lstStyle/>
+          <a:p>
+            <a:pPr algn="ctr"/>
+            <a:endParaRPr lang="en-US"/>
+          </a:p>
+        </p:txBody>
+      </p:sp>
+      <p:pic>
+        <p:nvPicPr>
+          <p:cNvPr id="5" name="Content Placeholder 4" descr="A blue and white sky&#10;&#10;Description automatically generated">
+            <a:extLst>
+              <a:ext uri="{FF2B5EF4-FFF2-40B4-BE49-F238E27FC236}">
+                <a16:creationId xmlns:a16="http://schemas.microsoft.com/office/drawing/2014/main" id="{F2768597-BB33-9BFF-EA7E-E4C9F8A0D5D0}"/>
+              </a:ext>
+            </a:extLst>
+          </p:cNvPr>
+          <p:cNvPicPr>
+            <a:picLocks noGrp="1" noRot="1" noChangeAspect="1" noMove="1" noResize="1" noEditPoints="1" noAdjustHandles="1" noChangeArrowheads="1" noChangeShapeType="1" noCrop="1"/>
+          </p:cNvPicPr>
+          <p:nvPr/>
+        </p:nvPicPr>
+        <p:blipFill>
+          <a:blip r:embed="rId2"/>
+          <a:srcRect r="6237"/>
+          <a:stretch/>
+        </p:blipFill>
+        <p:spPr>
+          <a:xfrm>
+            <a:off x="1" y="10"/>
+            <a:ext cx="9669642" cy="6857990"/>
+          </a:xfrm>
+          <a:prstGeom prst="rect">
+            <a:avLst/>
+          </a:prstGeom>
+        </p:spPr>
+      </p:pic>
+      <p:sp>
+        <p:nvSpPr>
+          <p:cNvPr id="16" name="Rectangle 15">
+            <a:extLst>
+              <a:ext uri="{FF2B5EF4-FFF2-40B4-BE49-F238E27FC236}">
+                <a16:creationId xmlns:a16="http://schemas.microsoft.com/office/drawing/2014/main" id="{D7DEAD93-B269-F264-F9C1-77C79BC11A61}"/>
+              </a:ext>
+              <a:ext uri="{C183D7F6-B498-43B3-948B-1728B52AA6E4}">
+                <adec:decorative xmlns:adec="http://schemas.microsoft.com/office/drawing/2017/decorative" val="1"/>
+              </a:ext>
+            </a:extLst>
+          </p:cNvPr>
+          <p:cNvSpPr>
+            <a:spLocks noGrp="1" noRot="1" noChangeAspect="1" noMove="1" noResize="1" noEditPoints="1" noAdjustHandles="1" noChangeArrowheads="1" noChangeShapeType="1" noTextEdit="1"/>
+          </p:cNvSpPr>
+          <p:nvPr>
+            <p:extLst>
+              <p:ext uri="{386F3935-93C4-4BCD-93E2-E3B085C9AB24}">
+                <p16:designElem xmlns:p16="http://schemas.microsoft.com/office/powerpoint/2015/main" val="1"/>
+              </p:ext>
+            </p:extLst>
+          </p:nvPr>
+        </p:nvSpPr>
+        <p:spPr>
+          <a:xfrm flipH="1">
+            <a:off x="5125019" y="0"/>
+            <a:ext cx="7066978" cy="6858000"/>
+          </a:xfrm>
+          <a:prstGeom prst="rect">
+            <a:avLst/>
+          </a:prstGeom>
+          <a:gradFill>
+            <a:gsLst>
+              <a:gs pos="48000">
+                <a:schemeClr val="bg1"/>
+              </a:gs>
+              <a:gs pos="35000">
+                <a:schemeClr val="bg1">
+                  <a:alpha val="77000"/>
+                </a:schemeClr>
+              </a:gs>
+              <a:gs pos="19000">
+                <a:schemeClr val="bg1">
+                  <a:alpha val="38000"/>
+                </a:schemeClr>
+              </a:gs>
+              <a:gs pos="0">
+                <a:schemeClr val="bg1">
+                  <a:alpha val="0"/>
+                </a:schemeClr>
+              </a:gs>
+              <a:gs pos="100000">
+                <a:schemeClr val="bg1"/>
+              </a:gs>
+            </a:gsLst>
+            <a:lin ang="10800000" scaled="0"/>
+          </a:gradFill>
+          <a:ln>
+            <a:noFill/>
+          </a:ln>
+        </p:spPr>
+        <p:style>
+          <a:lnRef idx="2">
+            <a:schemeClr val="accent1">
+              <a:shade val="50000"/>
+            </a:schemeClr>
+          </a:lnRef>
+          <a:fillRef idx="1">
+            <a:schemeClr val="accent1"/>
+          </a:fillRef>
+          <a:effectRef idx="0">
+            <a:schemeClr val="accent1"/>
+          </a:effectRef>
+          <a:fontRef idx="minor">
+            <a:schemeClr val="lt1"/>
+          </a:fontRef>
+        </p:style>
+        <p:txBody>
+          <a:bodyPr rtlCol="0" anchor="ctr"/>
+          <a:lstStyle/>
+          <a:p>
+            <a:pPr algn="ctr"/>
+            <a:endParaRPr lang="en-US" dirty="0"/>
+          </a:p>
+        </p:txBody>
+      </p:sp>
+      <p:sp>
+        <p:nvSpPr>
+          <p:cNvPr id="2" name="Title 1">
+            <a:extLst>
+              <a:ext uri="{FF2B5EF4-FFF2-40B4-BE49-F238E27FC236}">
+                <a16:creationId xmlns:a16="http://schemas.microsoft.com/office/drawing/2014/main" id="{91F8BAFD-9138-31EA-4AD5-1C12B5D323F9}"/>
+              </a:ext>
+            </a:extLst>
+          </p:cNvPr>
+          <p:cNvSpPr>
+            <a:spLocks noGrp="1"/>
+          </p:cNvSpPr>
+          <p:nvPr>
+            <p:ph type="title"/>
+          </p:nvPr>
+        </p:nvSpPr>
+        <p:spPr>
+          <a:xfrm>
+            <a:off x="775494" y="224816"/>
+            <a:ext cx="9132570" cy="912441"/>
+          </a:xfrm>
+        </p:spPr>
+        <p:txBody>
+          <a:bodyPr>
+            <a:normAutofit fontScale="90000"/>
+          </a:bodyPr>
+          <a:lstStyle/>
+          <a:p>
+            <a:r>
+              <a:rPr lang="en-US" sz="6000" b="1" dirty="0">
+                <a:gradFill flip="none" rotWithShape="1">
+                  <a:gsLst>
+                    <a:gs pos="7000">
+                      <a:schemeClr val="tx2">
+                        <a:lumMod val="50000"/>
+                        <a:lumOff val="50000"/>
+                      </a:schemeClr>
+                    </a:gs>
+                    <a:gs pos="35000">
+                      <a:schemeClr val="accent5">
+                        <a:lumMod val="60000"/>
+                        <a:lumOff val="40000"/>
+                      </a:schemeClr>
+                    </a:gs>
+                    <a:gs pos="76000">
+                      <a:srgbClr val="0070C0"/>
+                    </a:gs>
+                    <a:gs pos="97000">
+                      <a:schemeClr val="tx2">
+                        <a:lumMod val="75000"/>
+                        <a:lumOff val="25000"/>
+                      </a:schemeClr>
+                    </a:gs>
+                  </a:gsLst>
+                  <a:path path="rect">
+                    <a:fillToRect l="100000" t="100000"/>
+                  </a:path>
+                  <a:tileRect r="-100000" b="-100000"/>
+                </a:gradFill>
+                <a:latin typeface="Calibri" panose="020F0502020204030204" pitchFamily="34" charset="0"/>
+                <a:cs typeface="Calibri" panose="020F0502020204030204" pitchFamily="34" charset="0"/>
+              </a:rPr>
+              <a:t>Sliding Window Algorithm</a:t>
+            </a:r>
+            <a:endParaRPr lang="en-US" sz="4000" dirty="0"/>
+          </a:p>
+        </p:txBody>
+      </p:sp>
+      <p:pic>
+        <p:nvPicPr>
+          <p:cNvPr id="3" name="Picture 2" descr="A green dot in a black background&#10;&#10;Description automatically generated">
+            <a:extLst>
+              <a:ext uri="{FF2B5EF4-FFF2-40B4-BE49-F238E27FC236}">
+                <a16:creationId xmlns:a16="http://schemas.microsoft.com/office/drawing/2014/main" id="{C869E6FB-D320-9C9E-4719-7D24A42E63D0}"/>
+              </a:ext>
+            </a:extLst>
+          </p:cNvPr>
+          <p:cNvPicPr>
+            <a:picLocks noChangeAspect="1"/>
+          </p:cNvPicPr>
+          <p:nvPr/>
+        </p:nvPicPr>
+        <p:blipFill>
+          <a:blip r:embed="rId3"/>
+          <a:stretch>
+            <a:fillRect/>
+          </a:stretch>
+        </p:blipFill>
+        <p:spPr>
+          <a:xfrm>
+            <a:off x="0" y="6082506"/>
+            <a:ext cx="775494" cy="775494"/>
+          </a:xfrm>
+          <a:prstGeom prst="rect">
+            <a:avLst/>
+          </a:prstGeom>
+        </p:spPr>
+      </p:pic>
+      <p:pic>
+        <p:nvPicPr>
+          <p:cNvPr id="6" name="Picture 5">
+            <a:extLst>
+              <a:ext uri="{FF2B5EF4-FFF2-40B4-BE49-F238E27FC236}">
                 <a16:creationId xmlns:a16="http://schemas.microsoft.com/office/drawing/2014/main" id="{F0D75376-6F88-5F5F-888F-5A634FCFFE36}"/>
               </a:ext>
             </a:extLst>
@@ -9933,7 +11409,7 @@
 </p:sld>
 </file>
 
-<file path=ppt/slides/slide21.xml><?xml version="1.0" encoding="utf-8"?>
+<file path=ppt/slides/slide23.xml><?xml version="1.0" encoding="utf-8"?>
 <p:sld xmlns:a="http://schemas.openxmlformats.org/drawingml/2006/main" xmlns:r="http://schemas.openxmlformats.org/officeDocument/2006/relationships" xmlns:p="http://schemas.openxmlformats.org/presentationml/2006/main">
   <p:cSld>
     <p:bg>
